--- a/poster-slides/templates/48x36_vertical_poster.pptx
+++ b/poster-slides/templates/48x36_vertical_poster.pptx
@@ -4932,6 +4932,90 @@
           <a:chExt cx="0" cy="0"/>
         </a:xfrm>
       </p:grpSpPr>
+      <p:sp>
+        <p:nvSpPr>
+          <p:cNvPr id="2" name="Accessible slide title"/>
+          <p:cNvSpPr/>
+          <p:nvPr>
+            <p:ph type="title"/>
+          </p:nvPr>
+        </p:nvSpPr>
+        <p:spPr>
+          <a:xfrm>
+            <a:off x="0" y="-914400"/>
+            <a:ext cx="20000000" cy="457200"/>
+          </a:xfrm>
+          <a:noFill/>
+        </p:spPr>
+        <p:txBody>
+          <a:bodyPr/>
+          <a:lstStyle/>
+          <a:p>
+            <a:r>
+              <a:rPr lang="en-US" sz="2000"/>
+              <a:t>48x36 vertical poster template — instructions</a:t>
+            </a:r>
+          </a:p>
+        </p:txBody>
+      </p:sp>
+      <p:sp>
+        <p:nvSpPr>
+          <p:cNvPr id="3" name="Template instructions — accessible text equivalent"/>
+          <p:cNvSpPr/>
+          <p:nvPr/>
+        </p:nvSpPr>
+        <p:spPr>
+          <a:xfrm>
+            <a:off x="0" y="-20000000"/>
+            <a:ext cx="20000000" cy="18000000"/>
+          </a:xfrm>
+          <a:noFill/>
+        </p:spPr>
+        <p:txBody>
+          <a:bodyPr/>
+          <a:lstStyle/>
+          <a:p>
+            <a:r>
+              <a:t>This template is inspired by the #evenbetterpostertemplate and work by the MIT-BECL lab. </a:t>
+            </a:r>
+          </a:p>
+          <a:p>
+            <a:r>
+              <a:t>This default font for this template is Atkinson Hyperlegible which is designed to be accessible for low-vision readers. You may need to download and install the font on your device. Or you can select a font that is compatible with all Microsoft office products. </a:t>
+            </a:r>
+          </a:p>
+          <a:p>
+            <a:r>
+              <a:t>UNL’s color pallet is built into the template color theme.</a:t>
+            </a:r>
+          </a:p>
+          <a:p>
+            <a:r>
+              <a:t>You can change the background color in the Slide Master. </a:t>
+            </a:r>
+          </a:p>
+          <a:p>
+            <a:r>
+              <a:t>You also need to make your own QRC code or delete it on the Slide Master. </a:t>
+            </a:r>
+          </a:p>
+          <a:p>
+            <a:r>
+              <a:t>When inserting a graph, chart, table, etc., it will automatically be styled according to brand standards. To adjust colors, use the built-in color theme.</a:t>
+            </a:r>
+          </a:p>
+          <a:p>
+            <a:r>
+              <a:t>You can copy and paste UNL’s Law-Psych Program &amp; University logos from here below.</a:t>
+            </a:r>
+          </a:p>
+          <a:p>
+            <a:r>
+              <a:t>This slide is just for context and to help you use the template.</a:t>
+            </a:r>
+          </a:p>
+        </p:txBody>
+      </p:sp>
     </p:spTree>
     <p:extLst>
       <p:ext uri="{BB962C8B-B14F-4D97-AF65-F5344CB8AC3E}">
@@ -4964,7 +5048,110 @@
       </p:grpSpPr>
       <p:sp>
         <p:nvSpPr>
-          <p:cNvPr id="2" name="Content Placeholder 1">
+          <p:cNvPr id="14" name="Title 13">
+            <a:extLst>
+              <a:ext uri="{FF2B5EF4-FFF2-40B4-BE49-F238E27FC236}">
+                <a16:creationId xmlns:a16="http://schemas.microsoft.com/office/drawing/2014/main" id="{9D3AD3A1-BCCE-AD1E-363D-DEB0837CCC23}"/>
+              </a:ext>
+            </a:extLst>
+          </p:cNvPr>
+          <p:cNvSpPr>
+            <a:spLocks noGrp="1"/>
+          </p:cNvSpPr>
+          <p:nvPr>
+            <p:ph type="title"/>
+          </p:nvPr>
+        </p:nvSpPr>
+        <p:spPr/>
+        <p:txBody>
+          <a:bodyPr/>
+          <a:lstStyle/>
+          <a:p>
+            <a:r>
+              <a:rPr lang="en-US"/>
+              <a:t>48x36 vertical poster template — layout 1</a:t>
+            </a:r>
+          </a:p>
+        </p:txBody>
+      </p:sp>
+      <p:sp>
+        <p:nvSpPr>
+          <p:cNvPr id="15" name="Logo or QRC">
+            <a:extLst>
+              <a:ext uri="{FF2B5EF4-FFF2-40B4-BE49-F238E27FC236}">
+                <a16:creationId xmlns:a16="http://schemas.microsoft.com/office/drawing/2014/main" id="{B5872DA9-B683-C69E-9B0B-5B4FE92E6AB7}"/>
+              </a:ext>
+            </a:extLst>
+          </p:cNvPr>
+          <p:cNvSpPr>
+            <a:spLocks noGrp="1"/>
+          </p:cNvSpPr>
+          <p:nvPr>
+            <p:ph type="pic" sz="quarter" idx="23"/>
+          </p:nvPr>
+        </p:nvSpPr>
+        <p:spPr/>
+        <p:txBody>
+          <a:bodyPr/>
+          <a:lstStyle/>
+          <a:p>
+            <a:endParaRPr lang="en-US"/>
+          </a:p>
+        </p:txBody>
+      </p:sp>
+      <p:sp>
+        <p:nvSpPr>
+          <p:cNvPr id="16" name="Author(s): 60pt">
+            <a:extLst>
+              <a:ext uri="{FF2B5EF4-FFF2-40B4-BE49-F238E27FC236}">
+                <a16:creationId xmlns:a16="http://schemas.microsoft.com/office/drawing/2014/main" id="{68389950-E8BD-BCF9-3201-5C0542C66B62}"/>
+              </a:ext>
+            </a:extLst>
+          </p:cNvPr>
+          <p:cNvSpPr>
+            <a:spLocks noGrp="1"/>
+          </p:cNvSpPr>
+          <p:nvPr>
+            <p:ph type="body" sz="quarter" idx="21"/>
+          </p:nvPr>
+        </p:nvSpPr>
+        <p:spPr/>
+        <p:txBody>
+          <a:bodyPr/>
+          <a:lstStyle/>
+          <a:p>
+            <a:endParaRPr lang="en-US"/>
+          </a:p>
+        </p:txBody>
+      </p:sp>
+      <p:sp>
+        <p:nvSpPr>
+          <p:cNvPr id="17" name="Affiliation(s): 48pt">
+            <a:extLst>
+              <a:ext uri="{FF2B5EF4-FFF2-40B4-BE49-F238E27FC236}">
+                <a16:creationId xmlns:a16="http://schemas.microsoft.com/office/drawing/2014/main" id="{FAC210B9-7D5D-FAA1-213F-2A9C0EE7A8EC}"/>
+              </a:ext>
+            </a:extLst>
+          </p:cNvPr>
+          <p:cNvSpPr>
+            <a:spLocks noGrp="1"/>
+          </p:cNvSpPr>
+          <p:nvPr>
+            <p:ph type="body" sz="quarter" idx="45"/>
+          </p:nvPr>
+        </p:nvSpPr>
+        <p:spPr/>
+        <p:txBody>
+          <a:bodyPr/>
+          <a:lstStyle/>
+          <a:p>
+            <a:endParaRPr lang="en-US"/>
+          </a:p>
+        </p:txBody>
+      </p:sp>
+      <p:sp>
+        <p:nvSpPr>
+          <p:cNvPr id="2" name="Heading: 60pt bold">
             <a:extLst>
               <a:ext uri="{FF2B5EF4-FFF2-40B4-BE49-F238E27FC236}">
                 <a16:creationId xmlns:a16="http://schemas.microsoft.com/office/drawing/2014/main" id="{E05095C2-8745-8374-D575-480D66563B96}"/>
@@ -4989,7 +5176,32 @@
       </p:sp>
       <p:sp>
         <p:nvSpPr>
-          <p:cNvPr id="3" name="Content Placeholder 2">
+          <p:cNvPr id="4" name="Insert content here: 36pt">
+            <a:extLst>
+              <a:ext uri="{FF2B5EF4-FFF2-40B4-BE49-F238E27FC236}">
+                <a16:creationId xmlns:a16="http://schemas.microsoft.com/office/drawing/2014/main" id="{2F126581-A3B8-240D-B3CE-68024DD95BB5}"/>
+              </a:ext>
+            </a:extLst>
+          </p:cNvPr>
+          <p:cNvSpPr>
+            <a:spLocks noGrp="1"/>
+          </p:cNvSpPr>
+          <p:nvPr>
+            <p:ph type="body" sz="quarter" idx="22"/>
+          </p:nvPr>
+        </p:nvSpPr>
+        <p:spPr/>
+        <p:txBody>
+          <a:bodyPr/>
+          <a:lstStyle/>
+          <a:p>
+            <a:endParaRPr lang="en-US"/>
+          </a:p>
+        </p:txBody>
+      </p:sp>
+      <p:sp>
+        <p:nvSpPr>
+          <p:cNvPr id="3" name="Heading: 60pt bold">
             <a:extLst>
               <a:ext uri="{FF2B5EF4-FFF2-40B4-BE49-F238E27FC236}">
                 <a16:creationId xmlns:a16="http://schemas.microsoft.com/office/drawing/2014/main" id="{60E684FA-41AF-6849-EDCE-5032D94994DB}"/>
@@ -5014,18 +5226,18 @@
       </p:sp>
       <p:sp>
         <p:nvSpPr>
-          <p:cNvPr id="4" name="Text Placeholder 3">
-            <a:extLst>
-              <a:ext uri="{FF2B5EF4-FFF2-40B4-BE49-F238E27FC236}">
-                <a16:creationId xmlns:a16="http://schemas.microsoft.com/office/drawing/2014/main" id="{2F126581-A3B8-240D-B3CE-68024DD95BB5}"/>
-              </a:ext>
-            </a:extLst>
-          </p:cNvPr>
-          <p:cNvSpPr>
-            <a:spLocks noGrp="1"/>
-          </p:cNvSpPr>
-          <p:nvPr>
-            <p:ph type="body" sz="quarter" idx="22"/>
+          <p:cNvPr id="5" name="Insert content here: 36pt">
+            <a:extLst>
+              <a:ext uri="{FF2B5EF4-FFF2-40B4-BE49-F238E27FC236}">
+                <a16:creationId xmlns:a16="http://schemas.microsoft.com/office/drawing/2014/main" id="{9BC959A7-5162-16A0-1EDE-9303D4E929A9}"/>
+              </a:ext>
+            </a:extLst>
+          </p:cNvPr>
+          <p:cNvSpPr>
+            <a:spLocks noGrp="1"/>
+          </p:cNvSpPr>
+          <p:nvPr>
+            <p:ph type="body" sz="quarter" idx="25"/>
           </p:nvPr>
         </p:nvSpPr>
         <p:spPr/>
@@ -5039,18 +5251,18 @@
       </p:sp>
       <p:sp>
         <p:nvSpPr>
-          <p:cNvPr id="5" name="Text Placeholder 4">
-            <a:extLst>
-              <a:ext uri="{FF2B5EF4-FFF2-40B4-BE49-F238E27FC236}">
-                <a16:creationId xmlns:a16="http://schemas.microsoft.com/office/drawing/2014/main" id="{9BC959A7-5162-16A0-1EDE-9303D4E929A9}"/>
-              </a:ext>
-            </a:extLst>
-          </p:cNvPr>
-          <p:cNvSpPr>
-            <a:spLocks noGrp="1"/>
-          </p:cNvSpPr>
-          <p:nvPr>
-            <p:ph type="body" sz="quarter" idx="25"/>
+          <p:cNvPr id="7" name="Heading: 60pt bold">
+            <a:extLst>
+              <a:ext uri="{FF2B5EF4-FFF2-40B4-BE49-F238E27FC236}">
+                <a16:creationId xmlns:a16="http://schemas.microsoft.com/office/drawing/2014/main" id="{CFC6939F-E6E0-AF5E-107A-732227DF384D}"/>
+              </a:ext>
+            </a:extLst>
+          </p:cNvPr>
+          <p:cNvSpPr>
+            <a:spLocks noGrp="1"/>
+          </p:cNvSpPr>
+          <p:nvPr>
+            <p:ph idx="32"/>
           </p:nvPr>
         </p:nvSpPr>
         <p:spPr/>
@@ -5064,7 +5276,282 @@
       </p:sp>
       <p:sp>
         <p:nvSpPr>
-          <p:cNvPr id="6" name="Text Placeholder 5">
+          <p:cNvPr id="8" name="Insert content here: 36pt">
+            <a:extLst>
+              <a:ext uri="{FF2B5EF4-FFF2-40B4-BE49-F238E27FC236}">
+                <a16:creationId xmlns:a16="http://schemas.microsoft.com/office/drawing/2014/main" id="{12549489-14A0-4036-3ADF-A5CFA6171840}"/>
+              </a:ext>
+            </a:extLst>
+          </p:cNvPr>
+          <p:cNvSpPr>
+            <a:spLocks noGrp="1"/>
+          </p:cNvSpPr>
+          <p:nvPr>
+            <p:ph type="body" sz="quarter" idx="33"/>
+          </p:nvPr>
+        </p:nvSpPr>
+        <p:spPr/>
+        <p:txBody>
+          <a:bodyPr/>
+          <a:lstStyle/>
+          <a:p>
+            <a:endParaRPr lang="en-US"/>
+          </a:p>
+        </p:txBody>
+      </p:sp>
+      <p:sp>
+        <p:nvSpPr>
+          <p:cNvPr id="21" name="Picture Placeholder 20">
+            <a:extLst>
+              <a:ext uri="{FF2B5EF4-FFF2-40B4-BE49-F238E27FC236}">
+                <a16:creationId xmlns:a16="http://schemas.microsoft.com/office/drawing/2014/main" id="{130D5BA1-FAAB-4047-57E5-3FC360A71884}"/>
+              </a:ext>
+            </a:extLst>
+          </p:cNvPr>
+          <p:cNvSpPr>
+            <a:spLocks noGrp="1"/>
+          </p:cNvSpPr>
+          <p:nvPr>
+            <p:ph type="pic" sz="quarter" idx="58"/>
+          </p:nvPr>
+        </p:nvSpPr>
+        <p:spPr/>
+        <p:txBody>
+          <a:bodyPr/>
+          <a:lstStyle/>
+          <a:p>
+            <a:endParaRPr lang="en-US"/>
+          </a:p>
+        </p:txBody>
+      </p:sp>
+      <p:sp>
+        <p:nvSpPr>
+          <p:cNvPr id="20" name="Picture Placeholder 19">
+            <a:extLst>
+              <a:ext uri="{FF2B5EF4-FFF2-40B4-BE49-F238E27FC236}">
+                <a16:creationId xmlns:a16="http://schemas.microsoft.com/office/drawing/2014/main" id="{F88865D3-F550-75D1-08F4-6FED5B6BD2F5}"/>
+              </a:ext>
+            </a:extLst>
+          </p:cNvPr>
+          <p:cNvSpPr>
+            <a:spLocks noGrp="1"/>
+          </p:cNvSpPr>
+          <p:nvPr>
+            <p:ph type="pic" sz="quarter" idx="57"/>
+          </p:nvPr>
+        </p:nvSpPr>
+        <p:spPr/>
+        <p:txBody>
+          <a:bodyPr/>
+          <a:lstStyle/>
+          <a:p>
+            <a:endParaRPr lang="en-US"/>
+          </a:p>
+        </p:txBody>
+      </p:sp>
+      <p:sp>
+        <p:nvSpPr>
+          <p:cNvPr id="11" name="Click to add figure caption">
+            <a:extLst>
+              <a:ext uri="{FF2B5EF4-FFF2-40B4-BE49-F238E27FC236}">
+                <a16:creationId xmlns:a16="http://schemas.microsoft.com/office/drawing/2014/main" id="{FEB78321-A84F-79CA-BA1D-9C90AFC9B10B}"/>
+              </a:ext>
+            </a:extLst>
+          </p:cNvPr>
+          <p:cNvSpPr>
+            <a:spLocks noGrp="1"/>
+          </p:cNvSpPr>
+          <p:nvPr>
+            <p:ph type="chart" sz="quarter" idx="15"/>
+          </p:nvPr>
+        </p:nvSpPr>
+        <p:spPr/>
+        <p:txBody>
+          <a:bodyPr/>
+          <a:lstStyle/>
+          <a:p>
+            <a:endParaRPr lang="en-US"/>
+          </a:p>
+        </p:txBody>
+      </p:sp>
+      <p:sp>
+        <p:nvSpPr>
+          <p:cNvPr id="22" name="Click to add figure caption">
+            <a:extLst>
+              <a:ext uri="{FF2B5EF4-FFF2-40B4-BE49-F238E27FC236}">
+                <a16:creationId xmlns:a16="http://schemas.microsoft.com/office/drawing/2014/main" id="{F2385EF7-B37D-9F29-C32E-73EE9340733F}"/>
+              </a:ext>
+            </a:extLst>
+          </p:cNvPr>
+          <p:cNvSpPr>
+            <a:spLocks noGrp="1"/>
+          </p:cNvSpPr>
+          <p:nvPr>
+            <p:ph type="chart" sz="quarter" idx="59"/>
+          </p:nvPr>
+        </p:nvSpPr>
+        <p:spPr/>
+        <p:txBody>
+          <a:bodyPr/>
+          <a:lstStyle/>
+          <a:p>
+            <a:endParaRPr lang="en-US"/>
+          </a:p>
+        </p:txBody>
+      </p:sp>
+      <p:sp>
+        <p:nvSpPr>
+          <p:cNvPr id="19" name="Picture Placeholder 18">
+            <a:extLst>
+              <a:ext uri="{FF2B5EF4-FFF2-40B4-BE49-F238E27FC236}">
+                <a16:creationId xmlns:a16="http://schemas.microsoft.com/office/drawing/2014/main" id="{FFEA2316-0B20-E618-B2FD-FE51FB9D60DB}"/>
+              </a:ext>
+            </a:extLst>
+          </p:cNvPr>
+          <p:cNvSpPr>
+            <a:spLocks noGrp="1"/>
+          </p:cNvSpPr>
+          <p:nvPr>
+            <p:ph type="pic" sz="quarter" idx="56"/>
+          </p:nvPr>
+        </p:nvSpPr>
+        <p:spPr/>
+        <p:txBody>
+          <a:bodyPr/>
+          <a:lstStyle/>
+          <a:p>
+            <a:endParaRPr lang="en-US"/>
+          </a:p>
+        </p:txBody>
+      </p:sp>
+      <p:sp>
+        <p:nvSpPr>
+          <p:cNvPr id="18" name="Picture Placeholder 17">
+            <a:extLst>
+              <a:ext uri="{FF2B5EF4-FFF2-40B4-BE49-F238E27FC236}">
+                <a16:creationId xmlns:a16="http://schemas.microsoft.com/office/drawing/2014/main" id="{0B270288-114F-187B-3AD0-BD3BEC04F014}"/>
+              </a:ext>
+            </a:extLst>
+          </p:cNvPr>
+          <p:cNvSpPr>
+            <a:spLocks noGrp="1"/>
+          </p:cNvSpPr>
+          <p:nvPr>
+            <p:ph type="pic" sz="quarter" idx="55"/>
+          </p:nvPr>
+        </p:nvSpPr>
+        <p:spPr/>
+        <p:txBody>
+          <a:bodyPr/>
+          <a:lstStyle/>
+          <a:p>
+            <a:endParaRPr lang="en-US"/>
+          </a:p>
+        </p:txBody>
+      </p:sp>
+      <p:sp>
+        <p:nvSpPr>
+          <p:cNvPr id="9" name="Heading: 60pt bold">
+            <a:extLst>
+              <a:ext uri="{FF2B5EF4-FFF2-40B4-BE49-F238E27FC236}">
+                <a16:creationId xmlns:a16="http://schemas.microsoft.com/office/drawing/2014/main" id="{EE450FF6-893C-E1A5-5461-542607A8296D}"/>
+              </a:ext>
+            </a:extLst>
+          </p:cNvPr>
+          <p:cNvSpPr>
+            <a:spLocks noGrp="1"/>
+          </p:cNvSpPr>
+          <p:nvPr>
+            <p:ph idx="34"/>
+          </p:nvPr>
+        </p:nvSpPr>
+        <p:spPr/>
+        <p:txBody>
+          <a:bodyPr/>
+          <a:lstStyle/>
+          <a:p>
+            <a:endParaRPr lang="en-US"/>
+          </a:p>
+        </p:txBody>
+      </p:sp>
+      <p:sp>
+        <p:nvSpPr>
+          <p:cNvPr id="10" name="Insert content here: 36pt">
+            <a:extLst>
+              <a:ext uri="{FF2B5EF4-FFF2-40B4-BE49-F238E27FC236}">
+                <a16:creationId xmlns:a16="http://schemas.microsoft.com/office/drawing/2014/main" id="{54A66A1D-6FF2-ABF2-58E2-F448842F3442}"/>
+              </a:ext>
+            </a:extLst>
+          </p:cNvPr>
+          <p:cNvSpPr>
+            <a:spLocks noGrp="1"/>
+          </p:cNvSpPr>
+          <p:nvPr>
+            <p:ph type="body" sz="quarter" idx="35"/>
+          </p:nvPr>
+        </p:nvSpPr>
+        <p:spPr/>
+        <p:txBody>
+          <a:bodyPr/>
+          <a:lstStyle/>
+          <a:p>
+            <a:endParaRPr lang="en-US"/>
+          </a:p>
+        </p:txBody>
+      </p:sp>
+      <p:sp>
+        <p:nvSpPr>
+          <p:cNvPr id="12" name="Heading: 60pt bold">
+            <a:extLst>
+              <a:ext uri="{FF2B5EF4-FFF2-40B4-BE49-F238E27FC236}">
+                <a16:creationId xmlns:a16="http://schemas.microsoft.com/office/drawing/2014/main" id="{95BC2BFC-C6F5-4C5B-10EE-7C4C84D92441}"/>
+              </a:ext>
+            </a:extLst>
+          </p:cNvPr>
+          <p:cNvSpPr>
+            <a:spLocks noGrp="1"/>
+          </p:cNvSpPr>
+          <p:nvPr>
+            <p:ph idx="36"/>
+          </p:nvPr>
+        </p:nvSpPr>
+        <p:spPr/>
+        <p:txBody>
+          <a:bodyPr/>
+          <a:lstStyle/>
+          <a:p>
+            <a:endParaRPr lang="en-US"/>
+          </a:p>
+        </p:txBody>
+      </p:sp>
+      <p:sp>
+        <p:nvSpPr>
+          <p:cNvPr id="13" name="Insert content here: 36pt">
+            <a:extLst>
+              <a:ext uri="{FF2B5EF4-FFF2-40B4-BE49-F238E27FC236}">
+                <a16:creationId xmlns:a16="http://schemas.microsoft.com/office/drawing/2014/main" id="{54F9FA1E-92EF-8DAA-5AA2-EED6F9A172D1}"/>
+              </a:ext>
+            </a:extLst>
+          </p:cNvPr>
+          <p:cNvSpPr>
+            <a:spLocks noGrp="1"/>
+          </p:cNvSpPr>
+          <p:nvPr>
+            <p:ph type="body" sz="quarter" idx="37"/>
+          </p:nvPr>
+        </p:nvSpPr>
+        <p:spPr/>
+        <p:txBody>
+          <a:bodyPr/>
+          <a:lstStyle/>
+          <a:p>
+            <a:endParaRPr lang="en-US"/>
+          </a:p>
+        </p:txBody>
+      </p:sp>
+      <p:sp>
+        <p:nvSpPr>
+          <p:cNvPr id="6" name="Insert references here: 30pt                                Lorem ipsum dolor sit amet, consectetuer">
             <a:extLst>
               <a:ext uri="{FF2B5EF4-FFF2-40B4-BE49-F238E27FC236}">
                 <a16:creationId xmlns:a16="http://schemas.microsoft.com/office/drawing/2014/main" id="{5030E40F-53AE-7FA3-D964-A4BE84E006D2}"/>
@@ -5076,406 +5563,6 @@
           </p:cNvSpPr>
           <p:nvPr>
             <p:ph type="body" sz="quarter" idx="31"/>
-          </p:nvPr>
-        </p:nvSpPr>
-        <p:spPr/>
-        <p:txBody>
-          <a:bodyPr/>
-          <a:lstStyle/>
-          <a:p>
-            <a:endParaRPr lang="en-US"/>
-          </a:p>
-        </p:txBody>
-      </p:sp>
-      <p:sp>
-        <p:nvSpPr>
-          <p:cNvPr id="7" name="Content Placeholder 6">
-            <a:extLst>
-              <a:ext uri="{FF2B5EF4-FFF2-40B4-BE49-F238E27FC236}">
-                <a16:creationId xmlns:a16="http://schemas.microsoft.com/office/drawing/2014/main" id="{CFC6939F-E6E0-AF5E-107A-732227DF384D}"/>
-              </a:ext>
-            </a:extLst>
-          </p:cNvPr>
-          <p:cNvSpPr>
-            <a:spLocks noGrp="1"/>
-          </p:cNvSpPr>
-          <p:nvPr>
-            <p:ph idx="32"/>
-          </p:nvPr>
-        </p:nvSpPr>
-        <p:spPr/>
-        <p:txBody>
-          <a:bodyPr/>
-          <a:lstStyle/>
-          <a:p>
-            <a:endParaRPr lang="en-US"/>
-          </a:p>
-        </p:txBody>
-      </p:sp>
-      <p:sp>
-        <p:nvSpPr>
-          <p:cNvPr id="8" name="Text Placeholder 7">
-            <a:extLst>
-              <a:ext uri="{FF2B5EF4-FFF2-40B4-BE49-F238E27FC236}">
-                <a16:creationId xmlns:a16="http://schemas.microsoft.com/office/drawing/2014/main" id="{12549489-14A0-4036-3ADF-A5CFA6171840}"/>
-              </a:ext>
-            </a:extLst>
-          </p:cNvPr>
-          <p:cNvSpPr>
-            <a:spLocks noGrp="1"/>
-          </p:cNvSpPr>
-          <p:nvPr>
-            <p:ph type="body" sz="quarter" idx="33"/>
-          </p:nvPr>
-        </p:nvSpPr>
-        <p:spPr/>
-        <p:txBody>
-          <a:bodyPr/>
-          <a:lstStyle/>
-          <a:p>
-            <a:endParaRPr lang="en-US"/>
-          </a:p>
-        </p:txBody>
-      </p:sp>
-      <p:sp>
-        <p:nvSpPr>
-          <p:cNvPr id="9" name="Content Placeholder 8">
-            <a:extLst>
-              <a:ext uri="{FF2B5EF4-FFF2-40B4-BE49-F238E27FC236}">
-                <a16:creationId xmlns:a16="http://schemas.microsoft.com/office/drawing/2014/main" id="{EE450FF6-893C-E1A5-5461-542607A8296D}"/>
-              </a:ext>
-            </a:extLst>
-          </p:cNvPr>
-          <p:cNvSpPr>
-            <a:spLocks noGrp="1"/>
-          </p:cNvSpPr>
-          <p:nvPr>
-            <p:ph idx="34"/>
-          </p:nvPr>
-        </p:nvSpPr>
-        <p:spPr/>
-        <p:txBody>
-          <a:bodyPr/>
-          <a:lstStyle/>
-          <a:p>
-            <a:endParaRPr lang="en-US"/>
-          </a:p>
-        </p:txBody>
-      </p:sp>
-      <p:sp>
-        <p:nvSpPr>
-          <p:cNvPr id="10" name="Text Placeholder 9">
-            <a:extLst>
-              <a:ext uri="{FF2B5EF4-FFF2-40B4-BE49-F238E27FC236}">
-                <a16:creationId xmlns:a16="http://schemas.microsoft.com/office/drawing/2014/main" id="{54A66A1D-6FF2-ABF2-58E2-F448842F3442}"/>
-              </a:ext>
-            </a:extLst>
-          </p:cNvPr>
-          <p:cNvSpPr>
-            <a:spLocks noGrp="1"/>
-          </p:cNvSpPr>
-          <p:nvPr>
-            <p:ph type="body" sz="quarter" idx="35"/>
-          </p:nvPr>
-        </p:nvSpPr>
-        <p:spPr/>
-        <p:txBody>
-          <a:bodyPr/>
-          <a:lstStyle/>
-          <a:p>
-            <a:endParaRPr lang="en-US"/>
-          </a:p>
-        </p:txBody>
-      </p:sp>
-      <p:sp>
-        <p:nvSpPr>
-          <p:cNvPr id="11" name="Chart Placeholder 10">
-            <a:extLst>
-              <a:ext uri="{FF2B5EF4-FFF2-40B4-BE49-F238E27FC236}">
-                <a16:creationId xmlns:a16="http://schemas.microsoft.com/office/drawing/2014/main" id="{FEB78321-A84F-79CA-BA1D-9C90AFC9B10B}"/>
-              </a:ext>
-            </a:extLst>
-          </p:cNvPr>
-          <p:cNvSpPr>
-            <a:spLocks noGrp="1"/>
-          </p:cNvSpPr>
-          <p:nvPr>
-            <p:ph type="chart" sz="quarter" idx="15"/>
-          </p:nvPr>
-        </p:nvSpPr>
-        <p:spPr/>
-        <p:txBody>
-          <a:bodyPr/>
-          <a:lstStyle/>
-          <a:p>
-            <a:endParaRPr lang="en-US"/>
-          </a:p>
-        </p:txBody>
-      </p:sp>
-      <p:sp>
-        <p:nvSpPr>
-          <p:cNvPr id="12" name="Content Placeholder 11">
-            <a:extLst>
-              <a:ext uri="{FF2B5EF4-FFF2-40B4-BE49-F238E27FC236}">
-                <a16:creationId xmlns:a16="http://schemas.microsoft.com/office/drawing/2014/main" id="{95BC2BFC-C6F5-4C5B-10EE-7C4C84D92441}"/>
-              </a:ext>
-            </a:extLst>
-          </p:cNvPr>
-          <p:cNvSpPr>
-            <a:spLocks noGrp="1"/>
-          </p:cNvSpPr>
-          <p:nvPr>
-            <p:ph idx="36"/>
-          </p:nvPr>
-        </p:nvSpPr>
-        <p:spPr/>
-        <p:txBody>
-          <a:bodyPr/>
-          <a:lstStyle/>
-          <a:p>
-            <a:endParaRPr lang="en-US"/>
-          </a:p>
-        </p:txBody>
-      </p:sp>
-      <p:sp>
-        <p:nvSpPr>
-          <p:cNvPr id="13" name="Text Placeholder 12">
-            <a:extLst>
-              <a:ext uri="{FF2B5EF4-FFF2-40B4-BE49-F238E27FC236}">
-                <a16:creationId xmlns:a16="http://schemas.microsoft.com/office/drawing/2014/main" id="{54F9FA1E-92EF-8DAA-5AA2-EED6F9A172D1}"/>
-              </a:ext>
-            </a:extLst>
-          </p:cNvPr>
-          <p:cNvSpPr>
-            <a:spLocks noGrp="1"/>
-          </p:cNvSpPr>
-          <p:nvPr>
-            <p:ph type="body" sz="quarter" idx="37"/>
-          </p:nvPr>
-        </p:nvSpPr>
-        <p:spPr/>
-        <p:txBody>
-          <a:bodyPr/>
-          <a:lstStyle/>
-          <a:p>
-            <a:endParaRPr lang="en-US"/>
-          </a:p>
-        </p:txBody>
-      </p:sp>
-      <p:sp>
-        <p:nvSpPr>
-          <p:cNvPr id="14" name="Title 13">
-            <a:extLst>
-              <a:ext uri="{FF2B5EF4-FFF2-40B4-BE49-F238E27FC236}">
-                <a16:creationId xmlns:a16="http://schemas.microsoft.com/office/drawing/2014/main" id="{9D3AD3A1-BCCE-AD1E-363D-DEB0837CCC23}"/>
-              </a:ext>
-            </a:extLst>
-          </p:cNvPr>
-          <p:cNvSpPr>
-            <a:spLocks noGrp="1"/>
-          </p:cNvSpPr>
-          <p:nvPr>
-            <p:ph type="title"/>
-          </p:nvPr>
-        </p:nvSpPr>
-        <p:spPr/>
-        <p:txBody>
-          <a:bodyPr/>
-          <a:lstStyle/>
-          <a:p>
-            <a:endParaRPr lang="en-US"/>
-          </a:p>
-        </p:txBody>
-      </p:sp>
-      <p:sp>
-        <p:nvSpPr>
-          <p:cNvPr id="15" name="Picture Placeholder 14">
-            <a:extLst>
-              <a:ext uri="{FF2B5EF4-FFF2-40B4-BE49-F238E27FC236}">
-                <a16:creationId xmlns:a16="http://schemas.microsoft.com/office/drawing/2014/main" id="{B5872DA9-B683-C69E-9B0B-5B4FE92E6AB7}"/>
-              </a:ext>
-            </a:extLst>
-          </p:cNvPr>
-          <p:cNvSpPr>
-            <a:spLocks noGrp="1"/>
-          </p:cNvSpPr>
-          <p:nvPr>
-            <p:ph type="pic" sz="quarter" idx="23"/>
-          </p:nvPr>
-        </p:nvSpPr>
-        <p:spPr/>
-        <p:txBody>
-          <a:bodyPr/>
-          <a:lstStyle/>
-          <a:p>
-            <a:endParaRPr lang="en-US"/>
-          </a:p>
-        </p:txBody>
-      </p:sp>
-      <p:sp>
-        <p:nvSpPr>
-          <p:cNvPr id="16" name="Text Placeholder 15">
-            <a:extLst>
-              <a:ext uri="{FF2B5EF4-FFF2-40B4-BE49-F238E27FC236}">
-                <a16:creationId xmlns:a16="http://schemas.microsoft.com/office/drawing/2014/main" id="{68389950-E8BD-BCF9-3201-5C0542C66B62}"/>
-              </a:ext>
-            </a:extLst>
-          </p:cNvPr>
-          <p:cNvSpPr>
-            <a:spLocks noGrp="1"/>
-          </p:cNvSpPr>
-          <p:nvPr>
-            <p:ph type="body" sz="quarter" idx="21"/>
-          </p:nvPr>
-        </p:nvSpPr>
-        <p:spPr/>
-        <p:txBody>
-          <a:bodyPr/>
-          <a:lstStyle/>
-          <a:p>
-            <a:endParaRPr lang="en-US"/>
-          </a:p>
-        </p:txBody>
-      </p:sp>
-      <p:sp>
-        <p:nvSpPr>
-          <p:cNvPr id="17" name="Text Placeholder 16">
-            <a:extLst>
-              <a:ext uri="{FF2B5EF4-FFF2-40B4-BE49-F238E27FC236}">
-                <a16:creationId xmlns:a16="http://schemas.microsoft.com/office/drawing/2014/main" id="{FAC210B9-7D5D-FAA1-213F-2A9C0EE7A8EC}"/>
-              </a:ext>
-            </a:extLst>
-          </p:cNvPr>
-          <p:cNvSpPr>
-            <a:spLocks noGrp="1"/>
-          </p:cNvSpPr>
-          <p:nvPr>
-            <p:ph type="body" sz="quarter" idx="45"/>
-          </p:nvPr>
-        </p:nvSpPr>
-        <p:spPr/>
-        <p:txBody>
-          <a:bodyPr/>
-          <a:lstStyle/>
-          <a:p>
-            <a:endParaRPr lang="en-US"/>
-          </a:p>
-        </p:txBody>
-      </p:sp>
-      <p:sp>
-        <p:nvSpPr>
-          <p:cNvPr id="18" name="Picture Placeholder 17">
-            <a:extLst>
-              <a:ext uri="{FF2B5EF4-FFF2-40B4-BE49-F238E27FC236}">
-                <a16:creationId xmlns:a16="http://schemas.microsoft.com/office/drawing/2014/main" id="{0B270288-114F-187B-3AD0-BD3BEC04F014}"/>
-              </a:ext>
-            </a:extLst>
-          </p:cNvPr>
-          <p:cNvSpPr>
-            <a:spLocks noGrp="1"/>
-          </p:cNvSpPr>
-          <p:nvPr>
-            <p:ph type="pic" sz="quarter" idx="55"/>
-          </p:nvPr>
-        </p:nvSpPr>
-        <p:spPr/>
-        <p:txBody>
-          <a:bodyPr/>
-          <a:lstStyle/>
-          <a:p>
-            <a:endParaRPr lang="en-US"/>
-          </a:p>
-        </p:txBody>
-      </p:sp>
-      <p:sp>
-        <p:nvSpPr>
-          <p:cNvPr id="19" name="Picture Placeholder 18">
-            <a:extLst>
-              <a:ext uri="{FF2B5EF4-FFF2-40B4-BE49-F238E27FC236}">
-                <a16:creationId xmlns:a16="http://schemas.microsoft.com/office/drawing/2014/main" id="{FFEA2316-0B20-E618-B2FD-FE51FB9D60DB}"/>
-              </a:ext>
-            </a:extLst>
-          </p:cNvPr>
-          <p:cNvSpPr>
-            <a:spLocks noGrp="1"/>
-          </p:cNvSpPr>
-          <p:nvPr>
-            <p:ph type="pic" sz="quarter" idx="56"/>
-          </p:nvPr>
-        </p:nvSpPr>
-        <p:spPr/>
-        <p:txBody>
-          <a:bodyPr/>
-          <a:lstStyle/>
-          <a:p>
-            <a:endParaRPr lang="en-US"/>
-          </a:p>
-        </p:txBody>
-      </p:sp>
-      <p:sp>
-        <p:nvSpPr>
-          <p:cNvPr id="20" name="Picture Placeholder 19">
-            <a:extLst>
-              <a:ext uri="{FF2B5EF4-FFF2-40B4-BE49-F238E27FC236}">
-                <a16:creationId xmlns:a16="http://schemas.microsoft.com/office/drawing/2014/main" id="{F88865D3-F550-75D1-08F4-6FED5B6BD2F5}"/>
-              </a:ext>
-            </a:extLst>
-          </p:cNvPr>
-          <p:cNvSpPr>
-            <a:spLocks noGrp="1"/>
-          </p:cNvSpPr>
-          <p:nvPr>
-            <p:ph type="pic" sz="quarter" idx="57"/>
-          </p:nvPr>
-        </p:nvSpPr>
-        <p:spPr/>
-        <p:txBody>
-          <a:bodyPr/>
-          <a:lstStyle/>
-          <a:p>
-            <a:endParaRPr lang="en-US"/>
-          </a:p>
-        </p:txBody>
-      </p:sp>
-      <p:sp>
-        <p:nvSpPr>
-          <p:cNvPr id="21" name="Picture Placeholder 20">
-            <a:extLst>
-              <a:ext uri="{FF2B5EF4-FFF2-40B4-BE49-F238E27FC236}">
-                <a16:creationId xmlns:a16="http://schemas.microsoft.com/office/drawing/2014/main" id="{130D5BA1-FAAB-4047-57E5-3FC360A71884}"/>
-              </a:ext>
-            </a:extLst>
-          </p:cNvPr>
-          <p:cNvSpPr>
-            <a:spLocks noGrp="1"/>
-          </p:cNvSpPr>
-          <p:nvPr>
-            <p:ph type="pic" sz="quarter" idx="58"/>
-          </p:nvPr>
-        </p:nvSpPr>
-        <p:spPr/>
-        <p:txBody>
-          <a:bodyPr/>
-          <a:lstStyle/>
-          <a:p>
-            <a:endParaRPr lang="en-US"/>
-          </a:p>
-        </p:txBody>
-      </p:sp>
-      <p:sp>
-        <p:nvSpPr>
-          <p:cNvPr id="22" name="Chart Placeholder 21">
-            <a:extLst>
-              <a:ext uri="{FF2B5EF4-FFF2-40B4-BE49-F238E27FC236}">
-                <a16:creationId xmlns:a16="http://schemas.microsoft.com/office/drawing/2014/main" id="{F2385EF7-B37D-9F29-C32E-73EE9340733F}"/>
-              </a:ext>
-            </a:extLst>
-          </p:cNvPr>
-          <p:cNvSpPr>
-            <a:spLocks noGrp="1"/>
-          </p:cNvSpPr>
-          <p:nvPr>
-            <p:ph type="chart" sz="quarter" idx="59"/>
           </p:nvPr>
         </p:nvSpPr>
         <p:spPr/>
@@ -5519,7 +5606,114 @@
       </p:grpSpPr>
       <p:sp>
         <p:nvSpPr>
-          <p:cNvPr id="2" name="Content Placeholder 1">
+          <p:cNvPr id="14" name="Title 13">
+            <a:extLst>
+              <a:ext uri="{FF2B5EF4-FFF2-40B4-BE49-F238E27FC236}">
+                <a16:creationId xmlns:a16="http://schemas.microsoft.com/office/drawing/2014/main" id="{8F738214-8F9B-91AB-232E-1B0206BE1748}"/>
+              </a:ext>
+            </a:extLst>
+          </p:cNvPr>
+          <p:cNvSpPr>
+            <a:spLocks noGrp="1"/>
+          </p:cNvSpPr>
+          <p:nvPr>
+            <p:ph type="title"/>
+          </p:nvPr>
+        </p:nvSpPr>
+        <p:spPr/>
+        <p:txBody>
+          <a:bodyPr/>
+          <a:lstStyle/>
+          <a:p>
+            <a:r>
+              <a:rPr lang="en-US">
+                <a:solidFill>
+                  <a:srgbClr val="FFFFFF"/>
+                </a:solidFill>
+              </a:rPr>
+              <a:t>48x36 vertical poster template — layout 2</a:t>
+            </a:r>
+          </a:p>
+        </p:txBody>
+      </p:sp>
+      <p:sp>
+        <p:nvSpPr>
+          <p:cNvPr id="15" name="Logo or QRC">
+            <a:extLst>
+              <a:ext uri="{FF2B5EF4-FFF2-40B4-BE49-F238E27FC236}">
+                <a16:creationId xmlns:a16="http://schemas.microsoft.com/office/drawing/2014/main" id="{5EC04617-C716-1448-45E2-BE6F3A7B7F1A}"/>
+              </a:ext>
+            </a:extLst>
+          </p:cNvPr>
+          <p:cNvSpPr>
+            <a:spLocks noGrp="1"/>
+          </p:cNvSpPr>
+          <p:nvPr>
+            <p:ph type="pic" sz="quarter" idx="23"/>
+          </p:nvPr>
+        </p:nvSpPr>
+        <p:spPr/>
+        <p:txBody>
+          <a:bodyPr/>
+          <a:lstStyle/>
+          <a:p>
+            <a:endParaRPr lang="en-US"/>
+          </a:p>
+        </p:txBody>
+      </p:sp>
+      <p:sp>
+        <p:nvSpPr>
+          <p:cNvPr id="16" name="Author(s): 60pt">
+            <a:extLst>
+              <a:ext uri="{FF2B5EF4-FFF2-40B4-BE49-F238E27FC236}">
+                <a16:creationId xmlns:a16="http://schemas.microsoft.com/office/drawing/2014/main" id="{749A1F6F-9379-E7C7-159F-DD8E01CC4258}"/>
+              </a:ext>
+            </a:extLst>
+          </p:cNvPr>
+          <p:cNvSpPr>
+            <a:spLocks noGrp="1"/>
+          </p:cNvSpPr>
+          <p:nvPr>
+            <p:ph type="body" sz="quarter" idx="21"/>
+          </p:nvPr>
+        </p:nvSpPr>
+        <p:spPr/>
+        <p:txBody>
+          <a:bodyPr/>
+          <a:lstStyle/>
+          <a:p>
+            <a:endParaRPr lang="en-US"/>
+          </a:p>
+        </p:txBody>
+      </p:sp>
+      <p:sp>
+        <p:nvSpPr>
+          <p:cNvPr id="17" name="Affiliation(s): 48pt">
+            <a:extLst>
+              <a:ext uri="{FF2B5EF4-FFF2-40B4-BE49-F238E27FC236}">
+                <a16:creationId xmlns:a16="http://schemas.microsoft.com/office/drawing/2014/main" id="{E50CB9C1-1309-E242-3E0D-38E0607DDEE2}"/>
+              </a:ext>
+            </a:extLst>
+          </p:cNvPr>
+          <p:cNvSpPr>
+            <a:spLocks noGrp="1"/>
+          </p:cNvSpPr>
+          <p:nvPr>
+            <p:ph type="body" sz="quarter" idx="45"/>
+          </p:nvPr>
+        </p:nvSpPr>
+        <p:spPr/>
+        <p:txBody>
+          <a:bodyPr/>
+          <a:lstStyle/>
+          <a:p>
+            <a:endParaRPr lang="en-US"/>
+          </a:p>
+        </p:txBody>
+      </p:sp>
+      <p:sp>
+        <p:nvSpPr>
+          <p:cNvPr id="2" name="Heading: 60pt bold">
             <a:extLst>
               <a:ext uri="{FF2B5EF4-FFF2-40B4-BE49-F238E27FC236}">
                 <a16:creationId xmlns:a16="http://schemas.microsoft.com/office/drawing/2014/main" id="{A64494A9-5DB4-318F-E665-7CAE22277189}"/>
@@ -5544,7 +5738,32 @@
       </p:sp>
       <p:sp>
         <p:nvSpPr>
-          <p:cNvPr id="3" name="Content Placeholder 2">
+          <p:cNvPr id="4" name="Insert content here: 36pt">
+            <a:extLst>
+              <a:ext uri="{FF2B5EF4-FFF2-40B4-BE49-F238E27FC236}">
+                <a16:creationId xmlns:a16="http://schemas.microsoft.com/office/drawing/2014/main" id="{AE66B122-5245-82C1-DF34-D9F7AB358466}"/>
+              </a:ext>
+            </a:extLst>
+          </p:cNvPr>
+          <p:cNvSpPr>
+            <a:spLocks noGrp="1"/>
+          </p:cNvSpPr>
+          <p:nvPr>
+            <p:ph type="body" sz="quarter" idx="22"/>
+          </p:nvPr>
+        </p:nvSpPr>
+        <p:spPr/>
+        <p:txBody>
+          <a:bodyPr/>
+          <a:lstStyle/>
+          <a:p>
+            <a:endParaRPr lang="en-US"/>
+          </a:p>
+        </p:txBody>
+      </p:sp>
+      <p:sp>
+        <p:nvSpPr>
+          <p:cNvPr id="3" name="Heading: 60pt bold">
             <a:extLst>
               <a:ext uri="{FF2B5EF4-FFF2-40B4-BE49-F238E27FC236}">
                 <a16:creationId xmlns:a16="http://schemas.microsoft.com/office/drawing/2014/main" id="{D9F031FE-A0E3-8510-C32A-3D99843B5AC5}"/>
@@ -5569,18 +5788,18 @@
       </p:sp>
       <p:sp>
         <p:nvSpPr>
-          <p:cNvPr id="4" name="Text Placeholder 3">
-            <a:extLst>
-              <a:ext uri="{FF2B5EF4-FFF2-40B4-BE49-F238E27FC236}">
-                <a16:creationId xmlns:a16="http://schemas.microsoft.com/office/drawing/2014/main" id="{AE66B122-5245-82C1-DF34-D9F7AB358466}"/>
-              </a:ext>
-            </a:extLst>
-          </p:cNvPr>
-          <p:cNvSpPr>
-            <a:spLocks noGrp="1"/>
-          </p:cNvSpPr>
-          <p:nvPr>
-            <p:ph type="body" sz="quarter" idx="22"/>
+          <p:cNvPr id="5" name="Insert content here: 36pt">
+            <a:extLst>
+              <a:ext uri="{FF2B5EF4-FFF2-40B4-BE49-F238E27FC236}">
+                <a16:creationId xmlns:a16="http://schemas.microsoft.com/office/drawing/2014/main" id="{FA91F923-B620-667A-F45C-5BF32858547B}"/>
+              </a:ext>
+            </a:extLst>
+          </p:cNvPr>
+          <p:cNvSpPr>
+            <a:spLocks noGrp="1"/>
+          </p:cNvSpPr>
+          <p:nvPr>
+            <p:ph type="body" sz="quarter" idx="25"/>
           </p:nvPr>
         </p:nvSpPr>
         <p:spPr/>
@@ -5594,18 +5813,18 @@
       </p:sp>
       <p:sp>
         <p:nvSpPr>
-          <p:cNvPr id="5" name="Text Placeholder 4">
-            <a:extLst>
-              <a:ext uri="{FF2B5EF4-FFF2-40B4-BE49-F238E27FC236}">
-                <a16:creationId xmlns:a16="http://schemas.microsoft.com/office/drawing/2014/main" id="{FA91F923-B620-667A-F45C-5BF32858547B}"/>
-              </a:ext>
-            </a:extLst>
-          </p:cNvPr>
-          <p:cNvSpPr>
-            <a:spLocks noGrp="1"/>
-          </p:cNvSpPr>
-          <p:nvPr>
-            <p:ph type="body" sz="quarter" idx="25"/>
+          <p:cNvPr id="23" name="Graphical Abstract">
+            <a:extLst>
+              <a:ext uri="{FF2B5EF4-FFF2-40B4-BE49-F238E27FC236}">
+                <a16:creationId xmlns:a16="http://schemas.microsoft.com/office/drawing/2014/main" id="{DEE0105F-57E6-978F-4060-3BF08F128760}"/>
+              </a:ext>
+            </a:extLst>
+          </p:cNvPr>
+          <p:cNvSpPr>
+            <a:spLocks noGrp="1"/>
+          </p:cNvSpPr>
+          <p:nvPr>
+            <p:ph type="pic" sz="quarter" idx="60"/>
           </p:nvPr>
         </p:nvSpPr>
         <p:spPr/>
@@ -5619,7 +5838,332 @@
       </p:sp>
       <p:sp>
         <p:nvSpPr>
-          <p:cNvPr id="6" name="Text Placeholder 5">
+          <p:cNvPr id="7" name="Heading: 60pt bold">
+            <a:extLst>
+              <a:ext uri="{FF2B5EF4-FFF2-40B4-BE49-F238E27FC236}">
+                <a16:creationId xmlns:a16="http://schemas.microsoft.com/office/drawing/2014/main" id="{6787955F-A897-F089-8416-210EF994115A}"/>
+              </a:ext>
+            </a:extLst>
+          </p:cNvPr>
+          <p:cNvSpPr>
+            <a:spLocks noGrp="1"/>
+          </p:cNvSpPr>
+          <p:nvPr>
+            <p:ph idx="32"/>
+          </p:nvPr>
+        </p:nvSpPr>
+        <p:spPr/>
+        <p:txBody>
+          <a:bodyPr/>
+          <a:lstStyle/>
+          <a:p>
+            <a:endParaRPr lang="en-US"/>
+          </a:p>
+        </p:txBody>
+      </p:sp>
+      <p:sp>
+        <p:nvSpPr>
+          <p:cNvPr id="8" name="Insert content here: 36pt">
+            <a:extLst>
+              <a:ext uri="{FF2B5EF4-FFF2-40B4-BE49-F238E27FC236}">
+                <a16:creationId xmlns:a16="http://schemas.microsoft.com/office/drawing/2014/main" id="{6CC0106B-EF90-953E-A5FB-1901E287DD17}"/>
+              </a:ext>
+            </a:extLst>
+          </p:cNvPr>
+          <p:cNvSpPr>
+            <a:spLocks noGrp="1"/>
+          </p:cNvSpPr>
+          <p:nvPr>
+            <p:ph type="body" sz="quarter" idx="33"/>
+          </p:nvPr>
+        </p:nvSpPr>
+        <p:spPr/>
+        <p:txBody>
+          <a:bodyPr/>
+          <a:lstStyle/>
+          <a:p>
+            <a:endParaRPr lang="en-US"/>
+          </a:p>
+        </p:txBody>
+      </p:sp>
+      <p:sp>
+        <p:nvSpPr>
+          <p:cNvPr id="21" name="Picture Placeholder 20">
+            <a:extLst>
+              <a:ext uri="{FF2B5EF4-FFF2-40B4-BE49-F238E27FC236}">
+                <a16:creationId xmlns:a16="http://schemas.microsoft.com/office/drawing/2014/main" id="{87E2862A-AD88-D400-BC4F-6A721212F2F4}"/>
+              </a:ext>
+            </a:extLst>
+          </p:cNvPr>
+          <p:cNvSpPr>
+            <a:spLocks noGrp="1"/>
+          </p:cNvSpPr>
+          <p:nvPr>
+            <p:ph type="pic" sz="quarter" idx="58"/>
+          </p:nvPr>
+        </p:nvSpPr>
+        <p:spPr/>
+        <p:txBody>
+          <a:bodyPr/>
+          <a:lstStyle/>
+          <a:p>
+            <a:endParaRPr lang="en-US"/>
+          </a:p>
+        </p:txBody>
+      </p:sp>
+      <p:sp>
+        <p:nvSpPr>
+          <p:cNvPr id="20" name="Picture Placeholder 19">
+            <a:extLst>
+              <a:ext uri="{FF2B5EF4-FFF2-40B4-BE49-F238E27FC236}">
+                <a16:creationId xmlns:a16="http://schemas.microsoft.com/office/drawing/2014/main" id="{B40D3E2D-E4A7-DC2B-4587-A2AC4C5B2D63}"/>
+              </a:ext>
+            </a:extLst>
+          </p:cNvPr>
+          <p:cNvSpPr>
+            <a:spLocks noGrp="1"/>
+          </p:cNvSpPr>
+          <p:nvPr>
+            <p:ph type="pic" sz="quarter" idx="57"/>
+          </p:nvPr>
+        </p:nvSpPr>
+        <p:spPr/>
+        <p:txBody>
+          <a:bodyPr/>
+          <a:lstStyle/>
+          <a:p>
+            <a:endParaRPr lang="en-US"/>
+          </a:p>
+        </p:txBody>
+      </p:sp>
+      <p:sp>
+        <p:nvSpPr>
+          <p:cNvPr id="11" name="Click to add figure caption">
+            <a:extLst>
+              <a:ext uri="{FF2B5EF4-FFF2-40B4-BE49-F238E27FC236}">
+                <a16:creationId xmlns:a16="http://schemas.microsoft.com/office/drawing/2014/main" id="{665A1C98-57B4-B5B6-230C-94D40D08C735}"/>
+              </a:ext>
+            </a:extLst>
+          </p:cNvPr>
+          <p:cNvSpPr>
+            <a:spLocks noGrp="1"/>
+          </p:cNvSpPr>
+          <p:nvPr>
+            <p:ph type="chart" sz="quarter" idx="15"/>
+          </p:nvPr>
+        </p:nvSpPr>
+        <p:spPr/>
+        <p:txBody>
+          <a:bodyPr/>
+          <a:lstStyle/>
+          <a:p>
+            <a:endParaRPr lang="en-US"/>
+          </a:p>
+        </p:txBody>
+      </p:sp>
+      <p:sp>
+        <p:nvSpPr>
+          <p:cNvPr id="22" name="Click to add figure caption">
+            <a:extLst>
+              <a:ext uri="{FF2B5EF4-FFF2-40B4-BE49-F238E27FC236}">
+                <a16:creationId xmlns:a16="http://schemas.microsoft.com/office/drawing/2014/main" id="{3AFADFD6-66AD-0D3D-3285-C965768D8FC2}"/>
+              </a:ext>
+            </a:extLst>
+          </p:cNvPr>
+          <p:cNvSpPr>
+            <a:spLocks noGrp="1"/>
+          </p:cNvSpPr>
+          <p:nvPr>
+            <p:ph type="chart" sz="quarter" idx="59"/>
+          </p:nvPr>
+        </p:nvSpPr>
+        <p:spPr/>
+        <p:txBody>
+          <a:bodyPr/>
+          <a:lstStyle/>
+          <a:p>
+            <a:endParaRPr lang="en-US"/>
+          </a:p>
+        </p:txBody>
+      </p:sp>
+      <p:sp>
+        <p:nvSpPr>
+          <p:cNvPr id="24" name="Graphical Abstract">
+            <a:extLst>
+              <a:ext uri="{FF2B5EF4-FFF2-40B4-BE49-F238E27FC236}">
+                <a16:creationId xmlns:a16="http://schemas.microsoft.com/office/drawing/2014/main" id="{07D02AE5-EDFE-E15E-06DC-19BFB378FE7A}"/>
+              </a:ext>
+            </a:extLst>
+          </p:cNvPr>
+          <p:cNvSpPr>
+            <a:spLocks noGrp="1"/>
+          </p:cNvSpPr>
+          <p:nvPr>
+            <p:ph type="pic" sz="quarter" idx="61"/>
+          </p:nvPr>
+        </p:nvSpPr>
+        <p:spPr/>
+        <p:txBody>
+          <a:bodyPr/>
+          <a:lstStyle/>
+          <a:p>
+            <a:endParaRPr lang="en-US"/>
+          </a:p>
+        </p:txBody>
+      </p:sp>
+      <p:sp>
+        <p:nvSpPr>
+          <p:cNvPr id="19" name="Picture Placeholder 18">
+            <a:extLst>
+              <a:ext uri="{FF2B5EF4-FFF2-40B4-BE49-F238E27FC236}">
+                <a16:creationId xmlns:a16="http://schemas.microsoft.com/office/drawing/2014/main" id="{30F230BB-F6D9-CF68-1C43-AF83FB9DD64C}"/>
+              </a:ext>
+            </a:extLst>
+          </p:cNvPr>
+          <p:cNvSpPr>
+            <a:spLocks noGrp="1"/>
+          </p:cNvSpPr>
+          <p:nvPr>
+            <p:ph type="pic" sz="quarter" idx="56"/>
+          </p:nvPr>
+        </p:nvSpPr>
+        <p:spPr/>
+        <p:txBody>
+          <a:bodyPr/>
+          <a:lstStyle/>
+          <a:p>
+            <a:endParaRPr lang="en-US"/>
+          </a:p>
+        </p:txBody>
+      </p:sp>
+      <p:sp>
+        <p:nvSpPr>
+          <p:cNvPr id="18" name="Picture Placeholder 17">
+            <a:extLst>
+              <a:ext uri="{FF2B5EF4-FFF2-40B4-BE49-F238E27FC236}">
+                <a16:creationId xmlns:a16="http://schemas.microsoft.com/office/drawing/2014/main" id="{88CE58BA-B48D-F4A6-9072-8E08D6988B92}"/>
+              </a:ext>
+            </a:extLst>
+          </p:cNvPr>
+          <p:cNvSpPr>
+            <a:spLocks noGrp="1"/>
+          </p:cNvSpPr>
+          <p:nvPr>
+            <p:ph type="pic" sz="quarter" idx="55"/>
+          </p:nvPr>
+        </p:nvSpPr>
+        <p:spPr/>
+        <p:txBody>
+          <a:bodyPr/>
+          <a:lstStyle/>
+          <a:p>
+            <a:endParaRPr lang="en-US"/>
+          </a:p>
+        </p:txBody>
+      </p:sp>
+      <p:sp>
+        <p:nvSpPr>
+          <p:cNvPr id="9" name="Heading: 60pt bold">
+            <a:extLst>
+              <a:ext uri="{FF2B5EF4-FFF2-40B4-BE49-F238E27FC236}">
+                <a16:creationId xmlns:a16="http://schemas.microsoft.com/office/drawing/2014/main" id="{D0992E44-A8B5-F9CD-4DFC-9BC03FCA8D1A}"/>
+              </a:ext>
+            </a:extLst>
+          </p:cNvPr>
+          <p:cNvSpPr>
+            <a:spLocks noGrp="1"/>
+          </p:cNvSpPr>
+          <p:nvPr>
+            <p:ph idx="34"/>
+          </p:nvPr>
+        </p:nvSpPr>
+        <p:spPr/>
+        <p:txBody>
+          <a:bodyPr/>
+          <a:lstStyle/>
+          <a:p>
+            <a:endParaRPr lang="en-US"/>
+          </a:p>
+        </p:txBody>
+      </p:sp>
+      <p:sp>
+        <p:nvSpPr>
+          <p:cNvPr id="10" name="Insert content here: 36pt">
+            <a:extLst>
+              <a:ext uri="{FF2B5EF4-FFF2-40B4-BE49-F238E27FC236}">
+                <a16:creationId xmlns:a16="http://schemas.microsoft.com/office/drawing/2014/main" id="{89F50F89-EEA5-2664-68B9-59A36AA21595}"/>
+              </a:ext>
+            </a:extLst>
+          </p:cNvPr>
+          <p:cNvSpPr>
+            <a:spLocks noGrp="1"/>
+          </p:cNvSpPr>
+          <p:nvPr>
+            <p:ph type="body" sz="quarter" idx="35"/>
+          </p:nvPr>
+        </p:nvSpPr>
+        <p:spPr/>
+        <p:txBody>
+          <a:bodyPr/>
+          <a:lstStyle/>
+          <a:p>
+            <a:endParaRPr lang="en-US"/>
+          </a:p>
+        </p:txBody>
+      </p:sp>
+      <p:sp>
+        <p:nvSpPr>
+          <p:cNvPr id="12" name="Heading: 60pt bold">
+            <a:extLst>
+              <a:ext uri="{FF2B5EF4-FFF2-40B4-BE49-F238E27FC236}">
+                <a16:creationId xmlns:a16="http://schemas.microsoft.com/office/drawing/2014/main" id="{0A9CE4F2-F816-257C-DC48-EC93F64CAF9A}"/>
+              </a:ext>
+            </a:extLst>
+          </p:cNvPr>
+          <p:cNvSpPr>
+            <a:spLocks noGrp="1"/>
+          </p:cNvSpPr>
+          <p:nvPr>
+            <p:ph idx="36"/>
+          </p:nvPr>
+        </p:nvSpPr>
+        <p:spPr/>
+        <p:txBody>
+          <a:bodyPr/>
+          <a:lstStyle/>
+          <a:p>
+            <a:endParaRPr lang="en-US"/>
+          </a:p>
+        </p:txBody>
+      </p:sp>
+      <p:sp>
+        <p:nvSpPr>
+          <p:cNvPr id="13" name="Insert content here: 36pt">
+            <a:extLst>
+              <a:ext uri="{FF2B5EF4-FFF2-40B4-BE49-F238E27FC236}">
+                <a16:creationId xmlns:a16="http://schemas.microsoft.com/office/drawing/2014/main" id="{0F8F294D-B578-32DC-D950-EA7A0B2C5C17}"/>
+              </a:ext>
+            </a:extLst>
+          </p:cNvPr>
+          <p:cNvSpPr>
+            <a:spLocks noGrp="1"/>
+          </p:cNvSpPr>
+          <p:nvPr>
+            <p:ph type="body" sz="quarter" idx="37"/>
+          </p:nvPr>
+        </p:nvSpPr>
+        <p:spPr/>
+        <p:txBody>
+          <a:bodyPr/>
+          <a:lstStyle/>
+          <a:p>
+            <a:endParaRPr lang="en-US"/>
+          </a:p>
+        </p:txBody>
+      </p:sp>
+      <p:sp>
+        <p:nvSpPr>
+          <p:cNvPr id="6" name="Insert references here:">
             <a:extLst>
               <a:ext uri="{FF2B5EF4-FFF2-40B4-BE49-F238E27FC236}">
                 <a16:creationId xmlns:a16="http://schemas.microsoft.com/office/drawing/2014/main" id="{16B10CB2-04DD-1437-E6D9-301E8D77FE63}"/>
@@ -5631,456 +6175,6 @@
           </p:cNvSpPr>
           <p:nvPr>
             <p:ph type="body" sz="quarter" idx="31"/>
-          </p:nvPr>
-        </p:nvSpPr>
-        <p:spPr/>
-        <p:txBody>
-          <a:bodyPr/>
-          <a:lstStyle/>
-          <a:p>
-            <a:endParaRPr lang="en-US"/>
-          </a:p>
-        </p:txBody>
-      </p:sp>
-      <p:sp>
-        <p:nvSpPr>
-          <p:cNvPr id="7" name="Content Placeholder 6">
-            <a:extLst>
-              <a:ext uri="{FF2B5EF4-FFF2-40B4-BE49-F238E27FC236}">
-                <a16:creationId xmlns:a16="http://schemas.microsoft.com/office/drawing/2014/main" id="{6787955F-A897-F089-8416-210EF994115A}"/>
-              </a:ext>
-            </a:extLst>
-          </p:cNvPr>
-          <p:cNvSpPr>
-            <a:spLocks noGrp="1"/>
-          </p:cNvSpPr>
-          <p:nvPr>
-            <p:ph idx="32"/>
-          </p:nvPr>
-        </p:nvSpPr>
-        <p:spPr/>
-        <p:txBody>
-          <a:bodyPr/>
-          <a:lstStyle/>
-          <a:p>
-            <a:endParaRPr lang="en-US"/>
-          </a:p>
-        </p:txBody>
-      </p:sp>
-      <p:sp>
-        <p:nvSpPr>
-          <p:cNvPr id="8" name="Text Placeholder 7">
-            <a:extLst>
-              <a:ext uri="{FF2B5EF4-FFF2-40B4-BE49-F238E27FC236}">
-                <a16:creationId xmlns:a16="http://schemas.microsoft.com/office/drawing/2014/main" id="{6CC0106B-EF90-953E-A5FB-1901E287DD17}"/>
-              </a:ext>
-            </a:extLst>
-          </p:cNvPr>
-          <p:cNvSpPr>
-            <a:spLocks noGrp="1"/>
-          </p:cNvSpPr>
-          <p:nvPr>
-            <p:ph type="body" sz="quarter" idx="33"/>
-          </p:nvPr>
-        </p:nvSpPr>
-        <p:spPr/>
-        <p:txBody>
-          <a:bodyPr/>
-          <a:lstStyle/>
-          <a:p>
-            <a:endParaRPr lang="en-US"/>
-          </a:p>
-        </p:txBody>
-      </p:sp>
-      <p:sp>
-        <p:nvSpPr>
-          <p:cNvPr id="9" name="Content Placeholder 8">
-            <a:extLst>
-              <a:ext uri="{FF2B5EF4-FFF2-40B4-BE49-F238E27FC236}">
-                <a16:creationId xmlns:a16="http://schemas.microsoft.com/office/drawing/2014/main" id="{D0992E44-A8B5-F9CD-4DFC-9BC03FCA8D1A}"/>
-              </a:ext>
-            </a:extLst>
-          </p:cNvPr>
-          <p:cNvSpPr>
-            <a:spLocks noGrp="1"/>
-          </p:cNvSpPr>
-          <p:nvPr>
-            <p:ph idx="34"/>
-          </p:nvPr>
-        </p:nvSpPr>
-        <p:spPr/>
-        <p:txBody>
-          <a:bodyPr/>
-          <a:lstStyle/>
-          <a:p>
-            <a:endParaRPr lang="en-US"/>
-          </a:p>
-        </p:txBody>
-      </p:sp>
-      <p:sp>
-        <p:nvSpPr>
-          <p:cNvPr id="10" name="Text Placeholder 9">
-            <a:extLst>
-              <a:ext uri="{FF2B5EF4-FFF2-40B4-BE49-F238E27FC236}">
-                <a16:creationId xmlns:a16="http://schemas.microsoft.com/office/drawing/2014/main" id="{89F50F89-EEA5-2664-68B9-59A36AA21595}"/>
-              </a:ext>
-            </a:extLst>
-          </p:cNvPr>
-          <p:cNvSpPr>
-            <a:spLocks noGrp="1"/>
-          </p:cNvSpPr>
-          <p:nvPr>
-            <p:ph type="body" sz="quarter" idx="35"/>
-          </p:nvPr>
-        </p:nvSpPr>
-        <p:spPr/>
-        <p:txBody>
-          <a:bodyPr/>
-          <a:lstStyle/>
-          <a:p>
-            <a:endParaRPr lang="en-US"/>
-          </a:p>
-        </p:txBody>
-      </p:sp>
-      <p:sp>
-        <p:nvSpPr>
-          <p:cNvPr id="11" name="Chart Placeholder 10">
-            <a:extLst>
-              <a:ext uri="{FF2B5EF4-FFF2-40B4-BE49-F238E27FC236}">
-                <a16:creationId xmlns:a16="http://schemas.microsoft.com/office/drawing/2014/main" id="{665A1C98-57B4-B5B6-230C-94D40D08C735}"/>
-              </a:ext>
-            </a:extLst>
-          </p:cNvPr>
-          <p:cNvSpPr>
-            <a:spLocks noGrp="1"/>
-          </p:cNvSpPr>
-          <p:nvPr>
-            <p:ph type="chart" sz="quarter" idx="15"/>
-          </p:nvPr>
-        </p:nvSpPr>
-        <p:spPr/>
-        <p:txBody>
-          <a:bodyPr/>
-          <a:lstStyle/>
-          <a:p>
-            <a:endParaRPr lang="en-US"/>
-          </a:p>
-        </p:txBody>
-      </p:sp>
-      <p:sp>
-        <p:nvSpPr>
-          <p:cNvPr id="12" name="Content Placeholder 11">
-            <a:extLst>
-              <a:ext uri="{FF2B5EF4-FFF2-40B4-BE49-F238E27FC236}">
-                <a16:creationId xmlns:a16="http://schemas.microsoft.com/office/drawing/2014/main" id="{0A9CE4F2-F816-257C-DC48-EC93F64CAF9A}"/>
-              </a:ext>
-            </a:extLst>
-          </p:cNvPr>
-          <p:cNvSpPr>
-            <a:spLocks noGrp="1"/>
-          </p:cNvSpPr>
-          <p:nvPr>
-            <p:ph idx="36"/>
-          </p:nvPr>
-        </p:nvSpPr>
-        <p:spPr/>
-        <p:txBody>
-          <a:bodyPr/>
-          <a:lstStyle/>
-          <a:p>
-            <a:endParaRPr lang="en-US"/>
-          </a:p>
-        </p:txBody>
-      </p:sp>
-      <p:sp>
-        <p:nvSpPr>
-          <p:cNvPr id="13" name="Text Placeholder 12">
-            <a:extLst>
-              <a:ext uri="{FF2B5EF4-FFF2-40B4-BE49-F238E27FC236}">
-                <a16:creationId xmlns:a16="http://schemas.microsoft.com/office/drawing/2014/main" id="{0F8F294D-B578-32DC-D950-EA7A0B2C5C17}"/>
-              </a:ext>
-            </a:extLst>
-          </p:cNvPr>
-          <p:cNvSpPr>
-            <a:spLocks noGrp="1"/>
-          </p:cNvSpPr>
-          <p:nvPr>
-            <p:ph type="body" sz="quarter" idx="37"/>
-          </p:nvPr>
-        </p:nvSpPr>
-        <p:spPr/>
-        <p:txBody>
-          <a:bodyPr/>
-          <a:lstStyle/>
-          <a:p>
-            <a:endParaRPr lang="en-US"/>
-          </a:p>
-        </p:txBody>
-      </p:sp>
-      <p:sp>
-        <p:nvSpPr>
-          <p:cNvPr id="14" name="Title 13">
-            <a:extLst>
-              <a:ext uri="{FF2B5EF4-FFF2-40B4-BE49-F238E27FC236}">
-                <a16:creationId xmlns:a16="http://schemas.microsoft.com/office/drawing/2014/main" id="{8F738214-8F9B-91AB-232E-1B0206BE1748}"/>
-              </a:ext>
-            </a:extLst>
-          </p:cNvPr>
-          <p:cNvSpPr>
-            <a:spLocks noGrp="1"/>
-          </p:cNvSpPr>
-          <p:nvPr>
-            <p:ph type="title"/>
-          </p:nvPr>
-        </p:nvSpPr>
-        <p:spPr/>
-        <p:txBody>
-          <a:bodyPr/>
-          <a:lstStyle/>
-          <a:p>
-            <a:endParaRPr lang="en-US"/>
-          </a:p>
-        </p:txBody>
-      </p:sp>
-      <p:sp>
-        <p:nvSpPr>
-          <p:cNvPr id="15" name="Picture Placeholder 14">
-            <a:extLst>
-              <a:ext uri="{FF2B5EF4-FFF2-40B4-BE49-F238E27FC236}">
-                <a16:creationId xmlns:a16="http://schemas.microsoft.com/office/drawing/2014/main" id="{5EC04617-C716-1448-45E2-BE6F3A7B7F1A}"/>
-              </a:ext>
-            </a:extLst>
-          </p:cNvPr>
-          <p:cNvSpPr>
-            <a:spLocks noGrp="1"/>
-          </p:cNvSpPr>
-          <p:nvPr>
-            <p:ph type="pic" sz="quarter" idx="23"/>
-          </p:nvPr>
-        </p:nvSpPr>
-        <p:spPr/>
-        <p:txBody>
-          <a:bodyPr/>
-          <a:lstStyle/>
-          <a:p>
-            <a:endParaRPr lang="en-US"/>
-          </a:p>
-        </p:txBody>
-      </p:sp>
-      <p:sp>
-        <p:nvSpPr>
-          <p:cNvPr id="16" name="Text Placeholder 15">
-            <a:extLst>
-              <a:ext uri="{FF2B5EF4-FFF2-40B4-BE49-F238E27FC236}">
-                <a16:creationId xmlns:a16="http://schemas.microsoft.com/office/drawing/2014/main" id="{749A1F6F-9379-E7C7-159F-DD8E01CC4258}"/>
-              </a:ext>
-            </a:extLst>
-          </p:cNvPr>
-          <p:cNvSpPr>
-            <a:spLocks noGrp="1"/>
-          </p:cNvSpPr>
-          <p:nvPr>
-            <p:ph type="body" sz="quarter" idx="21"/>
-          </p:nvPr>
-        </p:nvSpPr>
-        <p:spPr/>
-        <p:txBody>
-          <a:bodyPr/>
-          <a:lstStyle/>
-          <a:p>
-            <a:endParaRPr lang="en-US"/>
-          </a:p>
-        </p:txBody>
-      </p:sp>
-      <p:sp>
-        <p:nvSpPr>
-          <p:cNvPr id="17" name="Text Placeholder 16">
-            <a:extLst>
-              <a:ext uri="{FF2B5EF4-FFF2-40B4-BE49-F238E27FC236}">
-                <a16:creationId xmlns:a16="http://schemas.microsoft.com/office/drawing/2014/main" id="{E50CB9C1-1309-E242-3E0D-38E0607DDEE2}"/>
-              </a:ext>
-            </a:extLst>
-          </p:cNvPr>
-          <p:cNvSpPr>
-            <a:spLocks noGrp="1"/>
-          </p:cNvSpPr>
-          <p:nvPr>
-            <p:ph type="body" sz="quarter" idx="45"/>
-          </p:nvPr>
-        </p:nvSpPr>
-        <p:spPr/>
-        <p:txBody>
-          <a:bodyPr/>
-          <a:lstStyle/>
-          <a:p>
-            <a:endParaRPr lang="en-US"/>
-          </a:p>
-        </p:txBody>
-      </p:sp>
-      <p:sp>
-        <p:nvSpPr>
-          <p:cNvPr id="18" name="Picture Placeholder 17">
-            <a:extLst>
-              <a:ext uri="{FF2B5EF4-FFF2-40B4-BE49-F238E27FC236}">
-                <a16:creationId xmlns:a16="http://schemas.microsoft.com/office/drawing/2014/main" id="{88CE58BA-B48D-F4A6-9072-8E08D6988B92}"/>
-              </a:ext>
-            </a:extLst>
-          </p:cNvPr>
-          <p:cNvSpPr>
-            <a:spLocks noGrp="1"/>
-          </p:cNvSpPr>
-          <p:nvPr>
-            <p:ph type="pic" sz="quarter" idx="55"/>
-          </p:nvPr>
-        </p:nvSpPr>
-        <p:spPr/>
-        <p:txBody>
-          <a:bodyPr/>
-          <a:lstStyle/>
-          <a:p>
-            <a:endParaRPr lang="en-US"/>
-          </a:p>
-        </p:txBody>
-      </p:sp>
-      <p:sp>
-        <p:nvSpPr>
-          <p:cNvPr id="19" name="Picture Placeholder 18">
-            <a:extLst>
-              <a:ext uri="{FF2B5EF4-FFF2-40B4-BE49-F238E27FC236}">
-                <a16:creationId xmlns:a16="http://schemas.microsoft.com/office/drawing/2014/main" id="{30F230BB-F6D9-CF68-1C43-AF83FB9DD64C}"/>
-              </a:ext>
-            </a:extLst>
-          </p:cNvPr>
-          <p:cNvSpPr>
-            <a:spLocks noGrp="1"/>
-          </p:cNvSpPr>
-          <p:nvPr>
-            <p:ph type="pic" sz="quarter" idx="56"/>
-          </p:nvPr>
-        </p:nvSpPr>
-        <p:spPr/>
-        <p:txBody>
-          <a:bodyPr/>
-          <a:lstStyle/>
-          <a:p>
-            <a:endParaRPr lang="en-US"/>
-          </a:p>
-        </p:txBody>
-      </p:sp>
-      <p:sp>
-        <p:nvSpPr>
-          <p:cNvPr id="20" name="Picture Placeholder 19">
-            <a:extLst>
-              <a:ext uri="{FF2B5EF4-FFF2-40B4-BE49-F238E27FC236}">
-                <a16:creationId xmlns:a16="http://schemas.microsoft.com/office/drawing/2014/main" id="{B40D3E2D-E4A7-DC2B-4587-A2AC4C5B2D63}"/>
-              </a:ext>
-            </a:extLst>
-          </p:cNvPr>
-          <p:cNvSpPr>
-            <a:spLocks noGrp="1"/>
-          </p:cNvSpPr>
-          <p:nvPr>
-            <p:ph type="pic" sz="quarter" idx="57"/>
-          </p:nvPr>
-        </p:nvSpPr>
-        <p:spPr/>
-        <p:txBody>
-          <a:bodyPr/>
-          <a:lstStyle/>
-          <a:p>
-            <a:endParaRPr lang="en-US"/>
-          </a:p>
-        </p:txBody>
-      </p:sp>
-      <p:sp>
-        <p:nvSpPr>
-          <p:cNvPr id="21" name="Picture Placeholder 20">
-            <a:extLst>
-              <a:ext uri="{FF2B5EF4-FFF2-40B4-BE49-F238E27FC236}">
-                <a16:creationId xmlns:a16="http://schemas.microsoft.com/office/drawing/2014/main" id="{87E2862A-AD88-D400-BC4F-6A721212F2F4}"/>
-              </a:ext>
-            </a:extLst>
-          </p:cNvPr>
-          <p:cNvSpPr>
-            <a:spLocks noGrp="1"/>
-          </p:cNvSpPr>
-          <p:nvPr>
-            <p:ph type="pic" sz="quarter" idx="58"/>
-          </p:nvPr>
-        </p:nvSpPr>
-        <p:spPr/>
-        <p:txBody>
-          <a:bodyPr/>
-          <a:lstStyle/>
-          <a:p>
-            <a:endParaRPr lang="en-US"/>
-          </a:p>
-        </p:txBody>
-      </p:sp>
-      <p:sp>
-        <p:nvSpPr>
-          <p:cNvPr id="22" name="Chart Placeholder 21">
-            <a:extLst>
-              <a:ext uri="{FF2B5EF4-FFF2-40B4-BE49-F238E27FC236}">
-                <a16:creationId xmlns:a16="http://schemas.microsoft.com/office/drawing/2014/main" id="{3AFADFD6-66AD-0D3D-3285-C965768D8FC2}"/>
-              </a:ext>
-            </a:extLst>
-          </p:cNvPr>
-          <p:cNvSpPr>
-            <a:spLocks noGrp="1"/>
-          </p:cNvSpPr>
-          <p:nvPr>
-            <p:ph type="chart" sz="quarter" idx="59"/>
-          </p:nvPr>
-        </p:nvSpPr>
-        <p:spPr/>
-        <p:txBody>
-          <a:bodyPr/>
-          <a:lstStyle/>
-          <a:p>
-            <a:endParaRPr lang="en-US"/>
-          </a:p>
-        </p:txBody>
-      </p:sp>
-      <p:sp>
-        <p:nvSpPr>
-          <p:cNvPr id="23" name="Picture Placeholder 22">
-            <a:extLst>
-              <a:ext uri="{FF2B5EF4-FFF2-40B4-BE49-F238E27FC236}">
-                <a16:creationId xmlns:a16="http://schemas.microsoft.com/office/drawing/2014/main" id="{DEE0105F-57E6-978F-4060-3BF08F128760}"/>
-              </a:ext>
-            </a:extLst>
-          </p:cNvPr>
-          <p:cNvSpPr>
-            <a:spLocks noGrp="1"/>
-          </p:cNvSpPr>
-          <p:nvPr>
-            <p:ph type="pic" sz="quarter" idx="60"/>
-          </p:nvPr>
-        </p:nvSpPr>
-        <p:spPr/>
-        <p:txBody>
-          <a:bodyPr/>
-          <a:lstStyle/>
-          <a:p>
-            <a:endParaRPr lang="en-US"/>
-          </a:p>
-        </p:txBody>
-      </p:sp>
-      <p:sp>
-        <p:nvSpPr>
-          <p:cNvPr id="24" name="Picture Placeholder 23">
-            <a:extLst>
-              <a:ext uri="{FF2B5EF4-FFF2-40B4-BE49-F238E27FC236}">
-                <a16:creationId xmlns:a16="http://schemas.microsoft.com/office/drawing/2014/main" id="{07D02AE5-EDFE-E15E-06DC-19BFB378FE7A}"/>
-              </a:ext>
-            </a:extLst>
-          </p:cNvPr>
-          <p:cNvSpPr>
-            <a:spLocks noGrp="1"/>
-          </p:cNvSpPr>
-          <p:nvPr>
-            <p:ph type="pic" sz="quarter" idx="61"/>
           </p:nvPr>
         </p:nvSpPr>
         <p:spPr/>
@@ -6124,7 +6218,33 @@
       </p:grpSpPr>
       <p:sp>
         <p:nvSpPr>
-          <p:cNvPr id="2" name="Text Placeholder 1">
+          <p:cNvPr id="17" name="Accessible slide title"/>
+          <p:cNvSpPr/>
+          <p:nvPr>
+            <p:ph type="title"/>
+          </p:nvPr>
+        </p:nvSpPr>
+        <p:spPr>
+          <a:xfrm>
+            <a:off x="0" y="-914400"/>
+            <a:ext cx="20000000" cy="457200"/>
+          </a:xfrm>
+          <a:noFill/>
+        </p:spPr>
+        <p:txBody>
+          <a:bodyPr/>
+          <a:lstStyle/>
+          <a:p>
+            <a:r>
+              <a:rPr lang="en-US" sz="2000"/>
+              <a:t>48x36 vertical poster template — layout 3</a:t>
+            </a:r>
+          </a:p>
+        </p:txBody>
+      </p:sp>
+      <p:sp>
+        <p:nvSpPr>
+          <p:cNvPr id="2" name="Super  Kewl  Title Goes Here">
             <a:extLst>
               <a:ext uri="{FF2B5EF4-FFF2-40B4-BE49-F238E27FC236}">
                 <a16:creationId xmlns:a16="http://schemas.microsoft.com/office/drawing/2014/main" id="{D84BA31E-D9AF-F9FD-1B33-0199F977143B}"/>
@@ -6149,7 +6269,7 @@
       </p:sp>
       <p:sp>
         <p:nvSpPr>
-          <p:cNvPr id="3" name="Text Placeholder 2">
+          <p:cNvPr id="3" name="Author(s)">
             <a:extLst>
               <a:ext uri="{FF2B5EF4-FFF2-40B4-BE49-F238E27FC236}">
                 <a16:creationId xmlns:a16="http://schemas.microsoft.com/office/drawing/2014/main" id="{35CA69F8-3D0C-53FB-0945-9D81DC7CB078}"/>
@@ -6174,7 +6294,157 @@
       </p:sp>
       <p:sp>
         <p:nvSpPr>
-          <p:cNvPr id="4" name="Text Placeholder 3">
+          <p:cNvPr id="13" name="Suggested boundaries for graphical abstract">
+            <a:extLst>
+              <a:ext uri="{FF2B5EF4-FFF2-40B4-BE49-F238E27FC236}">
+                <a16:creationId xmlns:a16="http://schemas.microsoft.com/office/drawing/2014/main" id="{5BD3A0A6-9C35-36BF-07C2-B634F3C1884D}"/>
+              </a:ext>
+            </a:extLst>
+          </p:cNvPr>
+          <p:cNvSpPr>
+            <a:spLocks noGrp="1"/>
+          </p:cNvSpPr>
+          <p:nvPr>
+            <p:ph type="body" sz="quarter" idx="32"/>
+          </p:nvPr>
+        </p:nvSpPr>
+        <p:spPr/>
+        <p:txBody>
+          <a:bodyPr/>
+          <a:lstStyle/>
+          <a:p>
+            <a:endParaRPr lang="en-US"/>
+          </a:p>
+        </p:txBody>
+      </p:sp>
+      <p:sp>
+        <p:nvSpPr>
+          <p:cNvPr id="5" name="Take-home message">
+            <a:extLst>
+              <a:ext uri="{FF2B5EF4-FFF2-40B4-BE49-F238E27FC236}">
+                <a16:creationId xmlns:a16="http://schemas.microsoft.com/office/drawing/2014/main" id="{1AA9EEAD-190E-7A46-72F3-3650355D1854}"/>
+              </a:ext>
+            </a:extLst>
+          </p:cNvPr>
+          <p:cNvSpPr>
+            <a:spLocks noGrp="1"/>
+          </p:cNvSpPr>
+          <p:nvPr>
+            <p:ph type="body" sz="quarter" idx="13"/>
+          </p:nvPr>
+        </p:nvSpPr>
+        <p:spPr/>
+        <p:txBody>
+          <a:bodyPr/>
+          <a:lstStyle/>
+          <a:p>
+            <a:endParaRPr lang="en-US"/>
+          </a:p>
+        </p:txBody>
+      </p:sp>
+      <p:sp>
+        <p:nvSpPr>
+          <p:cNvPr id="7" name="Main message of Fig. 1">
+            <a:extLst>
+              <a:ext uri="{FF2B5EF4-FFF2-40B4-BE49-F238E27FC236}">
+                <a16:creationId xmlns:a16="http://schemas.microsoft.com/office/drawing/2014/main" id="{0063EBEA-DA65-3BD8-3A56-0F1D03E0EE39}"/>
+              </a:ext>
+            </a:extLst>
+          </p:cNvPr>
+          <p:cNvSpPr>
+            <a:spLocks noGrp="1"/>
+          </p:cNvSpPr>
+          <p:nvPr>
+            <p:ph type="body" sz="quarter" idx="15"/>
+          </p:nvPr>
+        </p:nvSpPr>
+        <p:spPr/>
+        <p:txBody>
+          <a:bodyPr/>
+          <a:lstStyle/>
+          <a:p>
+            <a:endParaRPr lang="en-US"/>
+          </a:p>
+        </p:txBody>
+      </p:sp>
+      <p:sp>
+        <p:nvSpPr>
+          <p:cNvPr id="12" name="Suggested boundaries on Figure 1">
+            <a:extLst>
+              <a:ext uri="{FF2B5EF4-FFF2-40B4-BE49-F238E27FC236}">
+                <a16:creationId xmlns:a16="http://schemas.microsoft.com/office/drawing/2014/main" id="{61258021-791A-EF15-10C9-790025F598DF}"/>
+              </a:ext>
+            </a:extLst>
+          </p:cNvPr>
+          <p:cNvSpPr>
+            <a:spLocks noGrp="1"/>
+          </p:cNvSpPr>
+          <p:nvPr>
+            <p:ph type="body" sz="quarter" idx="28"/>
+          </p:nvPr>
+        </p:nvSpPr>
+        <p:spPr/>
+        <p:txBody>
+          <a:bodyPr/>
+          <a:lstStyle/>
+          <a:p>
+            <a:endParaRPr lang="en-US"/>
+          </a:p>
+        </p:txBody>
+      </p:sp>
+      <p:sp>
+        <p:nvSpPr>
+          <p:cNvPr id="8" name="Main message of Fig. 3">
+            <a:extLst>
+              <a:ext uri="{FF2B5EF4-FFF2-40B4-BE49-F238E27FC236}">
+                <a16:creationId xmlns:a16="http://schemas.microsoft.com/office/drawing/2014/main" id="{3D7B4CF9-7571-CBB8-7145-FB486739449C}"/>
+              </a:ext>
+            </a:extLst>
+          </p:cNvPr>
+          <p:cNvSpPr>
+            <a:spLocks noGrp="1"/>
+          </p:cNvSpPr>
+          <p:nvPr>
+            <p:ph type="body" sz="quarter" idx="16"/>
+          </p:nvPr>
+        </p:nvSpPr>
+        <p:spPr/>
+        <p:txBody>
+          <a:bodyPr/>
+          <a:lstStyle/>
+          <a:p>
+            <a:endParaRPr lang="en-US"/>
+          </a:p>
+        </p:txBody>
+      </p:sp>
+      <p:sp>
+        <p:nvSpPr>
+          <p:cNvPr id="15" name="Suggested boundaries on Figure 3">
+            <a:extLst>
+              <a:ext uri="{FF2B5EF4-FFF2-40B4-BE49-F238E27FC236}">
+                <a16:creationId xmlns:a16="http://schemas.microsoft.com/office/drawing/2014/main" id="{A7A3104A-D7CE-1D8D-C999-0470D923EC0A}"/>
+              </a:ext>
+            </a:extLst>
+          </p:cNvPr>
+          <p:cNvSpPr>
+            <a:spLocks noGrp="1"/>
+          </p:cNvSpPr>
+          <p:nvPr>
+            <p:ph type="body" sz="quarter" idx="37"/>
+          </p:nvPr>
+        </p:nvSpPr>
+        <p:spPr/>
+        <p:txBody>
+          <a:bodyPr/>
+          <a:lstStyle/>
+          <a:p>
+            <a:endParaRPr lang="en-US"/>
+          </a:p>
+        </p:txBody>
+      </p:sp>
+      <p:sp>
+        <p:nvSpPr>
+          <p:cNvPr id="4" name="&gt; 100 words">
             <a:extLst>
               <a:ext uri="{FF2B5EF4-FFF2-40B4-BE49-F238E27FC236}">
                 <a16:creationId xmlns:a16="http://schemas.microsoft.com/office/drawing/2014/main" id="{0BA9562B-2115-CC46-9CD2-DCC72CD55FA3}"/>
@@ -6199,18 +6469,18 @@
       </p:sp>
       <p:sp>
         <p:nvSpPr>
-          <p:cNvPr id="5" name="Text Placeholder 4">
-            <a:extLst>
-              <a:ext uri="{FF2B5EF4-FFF2-40B4-BE49-F238E27FC236}">
-                <a16:creationId xmlns:a16="http://schemas.microsoft.com/office/drawing/2014/main" id="{1AA9EEAD-190E-7A46-72F3-3650355D1854}"/>
-              </a:ext>
-            </a:extLst>
-          </p:cNvPr>
-          <p:cNvSpPr>
-            <a:spLocks noGrp="1"/>
-          </p:cNvSpPr>
-          <p:nvPr>
-            <p:ph type="body" sz="quarter" idx="13"/>
+          <p:cNvPr id="6" name="Highlight 1 Highlight 2 Highlight 3">
+            <a:extLst>
+              <a:ext uri="{FF2B5EF4-FFF2-40B4-BE49-F238E27FC236}">
+                <a16:creationId xmlns:a16="http://schemas.microsoft.com/office/drawing/2014/main" id="{6CAD02C1-A9DC-BB9C-9E77-95D0B6907A87}"/>
+              </a:ext>
+            </a:extLst>
+          </p:cNvPr>
+          <p:cNvSpPr>
+            <a:spLocks noGrp="1"/>
+          </p:cNvSpPr>
+          <p:nvPr>
+            <p:ph type="body" sz="quarter" idx="14"/>
           </p:nvPr>
         </p:nvSpPr>
         <p:spPr/>
@@ -6224,18 +6494,18 @@
       </p:sp>
       <p:sp>
         <p:nvSpPr>
-          <p:cNvPr id="6" name="Text Placeholder 5">
-            <a:extLst>
-              <a:ext uri="{FF2B5EF4-FFF2-40B4-BE49-F238E27FC236}">
-                <a16:creationId xmlns:a16="http://schemas.microsoft.com/office/drawing/2014/main" id="{6CAD02C1-A9DC-BB9C-9E77-95D0B6907A87}"/>
-              </a:ext>
-            </a:extLst>
-          </p:cNvPr>
-          <p:cNvSpPr>
-            <a:spLocks noGrp="1"/>
-          </p:cNvSpPr>
-          <p:nvPr>
-            <p:ph type="body" sz="quarter" idx="14"/>
+          <p:cNvPr id="10" name="Main message of Fig. 2">
+            <a:extLst>
+              <a:ext uri="{FF2B5EF4-FFF2-40B4-BE49-F238E27FC236}">
+                <a16:creationId xmlns:a16="http://schemas.microsoft.com/office/drawing/2014/main" id="{02D366C6-2573-FDD1-03AE-F85C1A17E5FC}"/>
+              </a:ext>
+            </a:extLst>
+          </p:cNvPr>
+          <p:cNvSpPr>
+            <a:spLocks noGrp="1"/>
+          </p:cNvSpPr>
+          <p:nvPr>
+            <p:ph type="body" sz="quarter" idx="18"/>
           </p:nvPr>
         </p:nvSpPr>
         <p:spPr/>
@@ -6249,18 +6519,18 @@
       </p:sp>
       <p:sp>
         <p:nvSpPr>
-          <p:cNvPr id="7" name="Text Placeholder 6">
-            <a:extLst>
-              <a:ext uri="{FF2B5EF4-FFF2-40B4-BE49-F238E27FC236}">
-                <a16:creationId xmlns:a16="http://schemas.microsoft.com/office/drawing/2014/main" id="{0063EBEA-DA65-3BD8-3A56-0F1D03E0EE39}"/>
-              </a:ext>
-            </a:extLst>
-          </p:cNvPr>
-          <p:cNvSpPr>
-            <a:spLocks noGrp="1"/>
-          </p:cNvSpPr>
-          <p:nvPr>
-            <p:ph type="body" sz="quarter" idx="15"/>
+          <p:cNvPr id="14" name="Suggested boundaries on Figure 2">
+            <a:extLst>
+              <a:ext uri="{FF2B5EF4-FFF2-40B4-BE49-F238E27FC236}">
+                <a16:creationId xmlns:a16="http://schemas.microsoft.com/office/drawing/2014/main" id="{C0A2A1DF-75BC-BBD4-57A3-6DF4CB6B665B}"/>
+              </a:ext>
+            </a:extLst>
+          </p:cNvPr>
+          <p:cNvSpPr>
+            <a:spLocks noGrp="1"/>
+          </p:cNvSpPr>
+          <p:nvPr>
+            <p:ph type="body" sz="quarter" idx="36"/>
           </p:nvPr>
         </p:nvSpPr>
         <p:spPr/>
@@ -6274,18 +6544,18 @@
       </p:sp>
       <p:sp>
         <p:nvSpPr>
-          <p:cNvPr id="8" name="Text Placeholder 7">
-            <a:extLst>
-              <a:ext uri="{FF2B5EF4-FFF2-40B4-BE49-F238E27FC236}">
-                <a16:creationId xmlns:a16="http://schemas.microsoft.com/office/drawing/2014/main" id="{3D7B4CF9-7571-CBB8-7145-FB486739449C}"/>
-              </a:ext>
-            </a:extLst>
-          </p:cNvPr>
-          <p:cNvSpPr>
-            <a:spLocks noGrp="1"/>
-          </p:cNvSpPr>
-          <p:nvPr>
-            <p:ph type="body" sz="quarter" idx="16"/>
+          <p:cNvPr id="9" name="Main message of Fig. 4">
+            <a:extLst>
+              <a:ext uri="{FF2B5EF4-FFF2-40B4-BE49-F238E27FC236}">
+                <a16:creationId xmlns:a16="http://schemas.microsoft.com/office/drawing/2014/main" id="{032EA500-30AF-A84D-FFAA-0DA72CC79784}"/>
+              </a:ext>
+            </a:extLst>
+          </p:cNvPr>
+          <p:cNvSpPr>
+            <a:spLocks noGrp="1"/>
+          </p:cNvSpPr>
+          <p:nvPr>
+            <p:ph type="body" sz="quarter" idx="17"/>
           </p:nvPr>
         </p:nvSpPr>
         <p:spPr/>
@@ -6299,18 +6569,18 @@
       </p:sp>
       <p:sp>
         <p:nvSpPr>
-          <p:cNvPr id="9" name="Text Placeholder 8">
-            <a:extLst>
-              <a:ext uri="{FF2B5EF4-FFF2-40B4-BE49-F238E27FC236}">
-                <a16:creationId xmlns:a16="http://schemas.microsoft.com/office/drawing/2014/main" id="{032EA500-30AF-A84D-FFAA-0DA72CC79784}"/>
-              </a:ext>
-            </a:extLst>
-          </p:cNvPr>
-          <p:cNvSpPr>
-            <a:spLocks noGrp="1"/>
-          </p:cNvSpPr>
-          <p:nvPr>
-            <p:ph type="body" sz="quarter" idx="17"/>
+          <p:cNvPr id="16" name="Suggested boundaries on Figure 4">
+            <a:extLst>
+              <a:ext uri="{FF2B5EF4-FFF2-40B4-BE49-F238E27FC236}">
+                <a16:creationId xmlns:a16="http://schemas.microsoft.com/office/drawing/2014/main" id="{2B6EF771-4C50-FFF6-4A4B-E9347F5128FA}"/>
+              </a:ext>
+            </a:extLst>
+          </p:cNvPr>
+          <p:cNvSpPr>
+            <a:spLocks noGrp="1"/>
+          </p:cNvSpPr>
+          <p:nvPr>
+            <p:ph type="body" sz="quarter" idx="38"/>
           </p:nvPr>
         </p:nvSpPr>
         <p:spPr/>
@@ -6324,32 +6594,7 @@
       </p:sp>
       <p:sp>
         <p:nvSpPr>
-          <p:cNvPr id="10" name="Text Placeholder 9">
-            <a:extLst>
-              <a:ext uri="{FF2B5EF4-FFF2-40B4-BE49-F238E27FC236}">
-                <a16:creationId xmlns:a16="http://schemas.microsoft.com/office/drawing/2014/main" id="{02D366C6-2573-FDD1-03AE-F85C1A17E5FC}"/>
-              </a:ext>
-            </a:extLst>
-          </p:cNvPr>
-          <p:cNvSpPr>
-            <a:spLocks noGrp="1"/>
-          </p:cNvSpPr>
-          <p:nvPr>
-            <p:ph type="body" sz="quarter" idx="18"/>
-          </p:nvPr>
-        </p:nvSpPr>
-        <p:spPr/>
-        <p:txBody>
-          <a:bodyPr/>
-          <a:lstStyle/>
-          <a:p>
-            <a:endParaRPr lang="en-US"/>
-          </a:p>
-        </p:txBody>
-      </p:sp>
-      <p:sp>
-        <p:nvSpPr>
-          <p:cNvPr id="11" name="Text Placeholder 10">
+          <p:cNvPr id="11" name="References, Funding, Acknowledgements, etc.">
             <a:extLst>
               <a:ext uri="{FF2B5EF4-FFF2-40B4-BE49-F238E27FC236}">
                 <a16:creationId xmlns:a16="http://schemas.microsoft.com/office/drawing/2014/main" id="{D72E9B01-BE78-597E-DD92-F898A08E541C}"/>
@@ -6361,131 +6606,6 @@
           </p:cNvSpPr>
           <p:nvPr>
             <p:ph type="body" sz="quarter" idx="19"/>
-          </p:nvPr>
-        </p:nvSpPr>
-        <p:spPr/>
-        <p:txBody>
-          <a:bodyPr/>
-          <a:lstStyle/>
-          <a:p>
-            <a:endParaRPr lang="en-US"/>
-          </a:p>
-        </p:txBody>
-      </p:sp>
-      <p:sp>
-        <p:nvSpPr>
-          <p:cNvPr id="12" name="Text Placeholder 11">
-            <a:extLst>
-              <a:ext uri="{FF2B5EF4-FFF2-40B4-BE49-F238E27FC236}">
-                <a16:creationId xmlns:a16="http://schemas.microsoft.com/office/drawing/2014/main" id="{61258021-791A-EF15-10C9-790025F598DF}"/>
-              </a:ext>
-            </a:extLst>
-          </p:cNvPr>
-          <p:cNvSpPr>
-            <a:spLocks noGrp="1"/>
-          </p:cNvSpPr>
-          <p:nvPr>
-            <p:ph type="body" sz="quarter" idx="28"/>
-          </p:nvPr>
-        </p:nvSpPr>
-        <p:spPr/>
-        <p:txBody>
-          <a:bodyPr/>
-          <a:lstStyle/>
-          <a:p>
-            <a:endParaRPr lang="en-US"/>
-          </a:p>
-        </p:txBody>
-      </p:sp>
-      <p:sp>
-        <p:nvSpPr>
-          <p:cNvPr id="13" name="Text Placeholder 12">
-            <a:extLst>
-              <a:ext uri="{FF2B5EF4-FFF2-40B4-BE49-F238E27FC236}">
-                <a16:creationId xmlns:a16="http://schemas.microsoft.com/office/drawing/2014/main" id="{5BD3A0A6-9C35-36BF-07C2-B634F3C1884D}"/>
-              </a:ext>
-            </a:extLst>
-          </p:cNvPr>
-          <p:cNvSpPr>
-            <a:spLocks noGrp="1"/>
-          </p:cNvSpPr>
-          <p:nvPr>
-            <p:ph type="body" sz="quarter" idx="32"/>
-          </p:nvPr>
-        </p:nvSpPr>
-        <p:spPr/>
-        <p:txBody>
-          <a:bodyPr/>
-          <a:lstStyle/>
-          <a:p>
-            <a:endParaRPr lang="en-US"/>
-          </a:p>
-        </p:txBody>
-      </p:sp>
-      <p:sp>
-        <p:nvSpPr>
-          <p:cNvPr id="14" name="Text Placeholder 13">
-            <a:extLst>
-              <a:ext uri="{FF2B5EF4-FFF2-40B4-BE49-F238E27FC236}">
-                <a16:creationId xmlns:a16="http://schemas.microsoft.com/office/drawing/2014/main" id="{C0A2A1DF-75BC-BBD4-57A3-6DF4CB6B665B}"/>
-              </a:ext>
-            </a:extLst>
-          </p:cNvPr>
-          <p:cNvSpPr>
-            <a:spLocks noGrp="1"/>
-          </p:cNvSpPr>
-          <p:nvPr>
-            <p:ph type="body" sz="quarter" idx="36"/>
-          </p:nvPr>
-        </p:nvSpPr>
-        <p:spPr/>
-        <p:txBody>
-          <a:bodyPr/>
-          <a:lstStyle/>
-          <a:p>
-            <a:endParaRPr lang="en-US"/>
-          </a:p>
-        </p:txBody>
-      </p:sp>
-      <p:sp>
-        <p:nvSpPr>
-          <p:cNvPr id="15" name="Text Placeholder 14">
-            <a:extLst>
-              <a:ext uri="{FF2B5EF4-FFF2-40B4-BE49-F238E27FC236}">
-                <a16:creationId xmlns:a16="http://schemas.microsoft.com/office/drawing/2014/main" id="{A7A3104A-D7CE-1D8D-C999-0470D923EC0A}"/>
-              </a:ext>
-            </a:extLst>
-          </p:cNvPr>
-          <p:cNvSpPr>
-            <a:spLocks noGrp="1"/>
-          </p:cNvSpPr>
-          <p:nvPr>
-            <p:ph type="body" sz="quarter" idx="37"/>
-          </p:nvPr>
-        </p:nvSpPr>
-        <p:spPr/>
-        <p:txBody>
-          <a:bodyPr/>
-          <a:lstStyle/>
-          <a:p>
-            <a:endParaRPr lang="en-US"/>
-          </a:p>
-        </p:txBody>
-      </p:sp>
-      <p:sp>
-        <p:nvSpPr>
-          <p:cNvPr id="16" name="Text Placeholder 15">
-            <a:extLst>
-              <a:ext uri="{FF2B5EF4-FFF2-40B4-BE49-F238E27FC236}">
-                <a16:creationId xmlns:a16="http://schemas.microsoft.com/office/drawing/2014/main" id="{2B6EF771-4C50-FFF6-4A4B-E9347F5128FA}"/>
-              </a:ext>
-            </a:extLst>
-          </p:cNvPr>
-          <p:cNvSpPr>
-            <a:spLocks noGrp="1"/>
-          </p:cNvSpPr>
-          <p:nvPr>
-            <p:ph type="body" sz="quarter" idx="38"/>
           </p:nvPr>
         </p:nvSpPr>
         <p:spPr/>
@@ -6533,7 +6653,7 @@
         <a:srgbClr val="BCCB2A"/>
       </a:accent2>
       <a:accent3>
-        <a:srgbClr val="F58A1F"/>
+        <a:srgbClr val="9C4300"/>
       </a:accent3>
       <a:accent4>
         <a:srgbClr val="005D83"/>
